--- a/Presentazione_NN_SatMAE.pptx
+++ b/Presentazione_NN_SatMAE.pptx
@@ -14,6 +14,17 @@
     <p:sldId id="262" r:id="rId17"/>
     <p:sldId id="263" r:id="rId18"/>
     <p:sldId id="264" r:id="rId19"/>
+    <p:sldId id="265" r:id="rId20"/>
+    <p:sldId id="266" r:id="rId21"/>
+    <p:sldId id="267" r:id="rId22"/>
+    <p:sldId id="268" r:id="rId23"/>
+    <p:sldId id="269" r:id="rId24"/>
+    <p:sldId id="270" r:id="rId25"/>
+    <p:sldId id="271" r:id="rId26"/>
+    <p:sldId id="272" r:id="rId27"/>
+    <p:sldId id="273" r:id="rId28"/>
+    <p:sldId id="274" r:id="rId29"/>
+    <p:sldId id="275" r:id="rId30"/>
   </p:sldIdLst>
   <p:sldSz cx="18288000" cy="10287000"/>
   <p:notesSz cx="6858000" cy="9144000"/>
@@ -3134,8 +3145,8 @@
         </p:nvSpPr>
         <p:spPr>
           <a:xfrm>
-            <a:off x="1280160" y="2468880"/>
-            <a:ext cx="15727680" cy="2377440"/>
+            <a:off x="1188720" y="822960"/>
+            <a:ext cx="15910559" cy="2377440"/>
           </a:xfrm>
           <a:prstGeom prst="rect">
             <a:avLst/>
@@ -3143,19 +3154,19 @@
           <a:noFill/>
         </p:spPr>
         <p:txBody>
-          <a:bodyPr wrap="square" anchor="t" lIns="25400" rIns="25400" tIns="25400" bIns="25400">
+          <a:bodyPr wrap="square" anchor="t" lIns="50800" rIns="50800" tIns="25400" bIns="25400">
             <a:spAutoFit/>
           </a:bodyPr>
           <a:lstStyle/>
           <a:p>
             <a:pPr algn="l">
               <a:spcAft>
-                <a:spcPts val="200"/>
-              </a:spcAft>
-              <a:buNone/>
-            </a:pPr>
-            <a:r>
-              <a:rPr sz="5600" b="1" i="0">
+                <a:spcPts val="400"/>
+              </a:spcAft>
+              <a:buNone/>
+            </a:pPr>
+            <a:r>
+              <a:rPr sz="5000" b="1" i="0">
                 <a:solidFill>
                   <a:srgbClr val="FFFFFF"/>
                 </a:solidFill>
@@ -3172,13 +3183,206 @@
               <a:buNone/>
             </a:pPr>
             <a:r>
-              <a:rPr sz="5600" b="1" i="0">
+              <a:rPr sz="3000" b="0" i="0">
+                <a:solidFill>
+                  <a:srgbClr val="ECD2D2"/>
+                </a:solidFill>
+                <a:latin typeface="Open Sans"/>
+              </a:rPr>
+              <a:t>Learning from Satellite Pretraining</a:t>
+            </a:r>
+          </a:p>
+        </p:txBody>
+      </p:sp>
+      <p:sp>
+        <p:nvSpPr>
+          <p:cNvPr id="4" name="Rounded Rectangle 3"/>
+          <p:cNvSpPr/>
+          <p:nvPr/>
+        </p:nvSpPr>
+        <p:spPr>
+          <a:xfrm>
+            <a:off x="1188720" y="3383280"/>
+            <a:ext cx="15910559" cy="5120640"/>
+          </a:xfrm>
+          <a:prstGeom prst="roundRect">
+            <a:avLst/>
+          </a:prstGeom>
+          <a:solidFill>
+            <a:srgbClr val="ECECEC"/>
+          </a:solidFill>
+          <a:ln w="15875">
+            <a:solidFill>
+              <a:srgbClr val="BCBCBC"/>
+            </a:solidFill>
+          </a:ln>
+          <a:effectLst/>
+        </p:spPr>
+        <p:style>
+          <a:lnRef idx="1">
+            <a:schemeClr val="accent1"/>
+          </a:lnRef>
+          <a:fillRef idx="3">
+            <a:schemeClr val="accent1"/>
+          </a:fillRef>
+          <a:effectRef idx="2">
+            <a:schemeClr val="accent1"/>
+          </a:effectRef>
+          <a:fontRef idx="minor">
+            <a:schemeClr val="lt1"/>
+          </a:fontRef>
+        </p:style>
+        <p:txBody>
+          <a:bodyPr rtlCol="0" anchor="ctr" wrap="square"/>
+          <a:lstStyle/>
+          <a:p>
+            <a:pPr algn="ctr"/>
+            <a:r>
+              <a:rPr sz="1500" i="1">
+                <a:solidFill>
+                  <a:srgbClr val="7A7A7A"/>
+                </a:solidFill>
+                <a:latin typeface="Open Sans"/>
+              </a:rPr>
+              <a:t>[ FULL-WIDTH IMAGE: satellite scene / LoveDA mosaic ]</a:t>
+            </a:r>
+          </a:p>
+        </p:txBody>
+      </p:sp>
+      <p:sp>
+        <p:nvSpPr>
+          <p:cNvPr id="5" name="TextBox 4"/>
+          <p:cNvSpPr txBox="1"/>
+          <p:nvPr/>
+        </p:nvSpPr>
+        <p:spPr>
+          <a:xfrm>
+            <a:off x="1188720" y="8869680"/>
+            <a:ext cx="15910559" cy="731520"/>
+          </a:xfrm>
+          <a:prstGeom prst="rect">
+            <a:avLst/>
+          </a:prstGeom>
+          <a:noFill/>
+        </p:spPr>
+        <p:txBody>
+          <a:bodyPr wrap="square" anchor="t" lIns="50800" rIns="50800" tIns="25400" bIns="25400">
+            <a:spAutoFit/>
+          </a:bodyPr>
+          <a:lstStyle/>
+          <a:p>
+            <a:pPr algn="l">
+              <a:spcAft>
+                <a:spcPts val="0"/>
+              </a:spcAft>
+              <a:buNone/>
+            </a:pPr>
+            <a:r>
+              <a:rPr sz="1800" b="1" i="0">
                 <a:solidFill>
                   <a:srgbClr val="FFFFFF"/>
                 </a:solidFill>
                 <a:latin typeface="Open Sans"/>
               </a:rPr>
-              <a:t>with Pretrained Models</a:t>
+              <a:t>Neural Networks  -  A.A. 2025/2026</a:t>
+            </a:r>
+          </a:p>
+        </p:txBody>
+      </p:sp>
+    </p:spTree>
+  </p:cSld>
+  <p:clrMapOvr>
+    <a:masterClrMapping/>
+  </p:clrMapOvr>
+</p:sld>
+</file>
+
+<file path=ppt/slides/slide10.xml><?xml version="1.0" encoding="utf-8"?>
+<p:sld xmlns:a="http://schemas.openxmlformats.org/drawingml/2006/main" xmlns:p="http://schemas.openxmlformats.org/presentationml/2006/main" xmlns:r="http://schemas.openxmlformats.org/officeDocument/2006/relationships">
+  <p:cSld>
+    <p:spTree>
+      <p:nvGrpSpPr>
+        <p:cNvPr id="1" name=""/>
+        <p:cNvGrpSpPr/>
+        <p:nvPr/>
+      </p:nvGrpSpPr>
+      <p:grpSpPr/>
+      <p:sp>
+        <p:nvSpPr>
+          <p:cNvPr id="2" name="TextBox 1"/>
+          <p:cNvSpPr txBox="1"/>
+          <p:nvPr/>
+        </p:nvSpPr>
+        <p:spPr>
+          <a:xfrm>
+            <a:off x="822960" y="457200"/>
+            <a:ext cx="16642080" cy="1280160"/>
+          </a:xfrm>
+          <a:prstGeom prst="rect">
+            <a:avLst/>
+          </a:prstGeom>
+          <a:noFill/>
+        </p:spPr>
+        <p:txBody>
+          <a:bodyPr wrap="square" anchor="t" lIns="50800" rIns="50800" tIns="25400" bIns="25400">
+            <a:spAutoFit/>
+          </a:bodyPr>
+          <a:lstStyle/>
+          <a:p>
+            <a:pPr algn="l">
+              <a:spcAft>
+                <a:spcPts val="0"/>
+              </a:spcAft>
+              <a:buNone/>
+            </a:pPr>
+            <a:r>
+              <a:rPr sz="4000" b="1" i="0">
+                <a:solidFill>
+                  <a:srgbClr val="6F0A19"/>
+                </a:solidFill>
+                <a:latin typeface="Open Sans"/>
+              </a:rPr>
+              <a:t>LoveDA Results</a:t>
+            </a:r>
+          </a:p>
+        </p:txBody>
+      </p:sp>
+      <p:sp>
+        <p:nvSpPr>
+          <p:cNvPr id="3" name="TextBox 2"/>
+          <p:cNvSpPr txBox="1"/>
+          <p:nvPr/>
+        </p:nvSpPr>
+        <p:spPr>
+          <a:xfrm>
+            <a:off x="1828800" y="2103120"/>
+            <a:ext cx="7772400" cy="1005840"/>
+          </a:xfrm>
+          <a:prstGeom prst="rect">
+            <a:avLst/>
+          </a:prstGeom>
+          <a:noFill/>
+        </p:spPr>
+        <p:txBody>
+          <a:bodyPr wrap="square" anchor="ctr" lIns="50800" rIns="50800" tIns="25400" bIns="25400">
+            <a:spAutoFit/>
+          </a:bodyPr>
+          <a:lstStyle/>
+          <a:p>
+            <a:pPr algn="l">
+              <a:spcAft>
+                <a:spcPts val="0"/>
+              </a:spcAft>
+              <a:buNone/>
+            </a:pPr>
+            <a:r>
+              <a:rPr sz="3400" b="1" i="0">
+                <a:solidFill>
+                  <a:srgbClr val="202020"/>
+                </a:solidFill>
+                <a:latin typeface="Open Sans"/>
+              </a:rPr>
+              <a:t>Scratch</a:t>
             </a:r>
           </a:p>
         </p:txBody>
@@ -3191,8 +3395,8 @@
         </p:nvSpPr>
         <p:spPr>
           <a:xfrm>
-            <a:off x="1280160" y="5120640"/>
-            <a:ext cx="14630400" cy="1280160"/>
+            <a:off x="10058400" y="2103120"/>
+            <a:ext cx="4572000" cy="1005840"/>
           </a:xfrm>
           <a:prstGeom prst="rect">
             <a:avLst/>
@@ -3200,7 +3404,7 @@
           <a:noFill/>
         </p:spPr>
         <p:txBody>
-          <a:bodyPr wrap="square" anchor="t" lIns="25400" rIns="25400" tIns="25400" bIns="25400">
+          <a:bodyPr wrap="square" anchor="ctr" lIns="50800" rIns="50800" tIns="25400" bIns="25400">
             <a:spAutoFit/>
           </a:bodyPr>
           <a:lstStyle/>
@@ -3212,13 +3416,13 @@
               <a:buNone/>
             </a:pPr>
             <a:r>
-              <a:rPr sz="2200" b="0" i="0">
-                <a:solidFill>
-                  <a:srgbClr val="F0D8D8"/>
-                </a:solidFill>
-                <a:latin typeface="Open Sans"/>
-              </a:rPr>
-              <a:t>Pretraining on satellite imagery for data-scarce land-cover segmentation (LoveDA)</a:t>
+              <a:rPr sz="4000" b="1" i="0">
+                <a:solidFill>
+                  <a:srgbClr val="7A7A7A"/>
+                </a:solidFill>
+                <a:latin typeface="Open Sans"/>
+              </a:rPr>
+              <a:t>0.09</a:t>
             </a:r>
           </a:p>
         </p:txBody>
@@ -3231,8 +3435,8 @@
         </p:nvSpPr>
         <p:spPr>
           <a:xfrm>
-            <a:off x="1280160" y="7955279"/>
-            <a:ext cx="11430000" cy="1463040"/>
+            <a:off x="1828800" y="3337560"/>
+            <a:ext cx="7772400" cy="1005840"/>
           </a:xfrm>
           <a:prstGeom prst="rect">
             <a:avLst/>
@@ -3240,51 +3444,25 @@
           <a:noFill/>
         </p:spPr>
         <p:txBody>
-          <a:bodyPr wrap="square" anchor="t" lIns="25400" rIns="25400" tIns="25400" bIns="25400">
+          <a:bodyPr wrap="square" anchor="ctr" lIns="50800" rIns="50800" tIns="25400" bIns="25400">
             <a:spAutoFit/>
           </a:bodyPr>
           <a:lstStyle/>
           <a:p>
             <a:pPr algn="l">
               <a:spcAft>
-                <a:spcPts val="400"/>
-              </a:spcAft>
-              <a:buNone/>
-            </a:pPr>
-            <a:r>
-              <a:rPr sz="2000" b="1" i="0">
-                <a:solidFill>
-                  <a:srgbClr val="FFFFFF"/>
-                </a:solidFill>
-                <a:latin typeface="Open Sans"/>
-              </a:rPr>
-              <a:t>Neural Networks - A.Y. 2025/2026</a:t>
-            </a:r>
-          </a:p>
-          <a:p>
-            <a:pPr algn="l">
-              <a:spcAft>
-                <a:spcPts val="800"/>
-              </a:spcAft>
-              <a:buNone/>
-            </a:pPr>
-            <a:r>
-              <a:rPr sz="1800" b="1" i="0">
-                <a:solidFill>
-                  <a:srgbClr val="F0D8D8"/>
-                </a:solidFill>
-                <a:latin typeface="Open Sans"/>
-              </a:rPr>
-              <a:t>Giorgio De Santis   -   </a:t>
-            </a:r>
-            <a:r>
-              <a:rPr sz="1800" b="0" i="0">
-                <a:solidFill>
-                  <a:srgbClr val="F0D8D8"/>
-                </a:solidFill>
-                <a:latin typeface="Open Sans"/>
-              </a:rPr>
-              <a:t>[second group member]</a:t>
+                <a:spcPts val="0"/>
+              </a:spcAft>
+              <a:buNone/>
+            </a:pPr>
+            <a:r>
+              <a:rPr sz="3400" b="1" i="0">
+                <a:solidFill>
+                  <a:srgbClr val="202020"/>
+                </a:solidFill>
+                <a:latin typeface="Open Sans"/>
+              </a:rPr>
+              <a:t>RSP</a:t>
             </a:r>
           </a:p>
         </p:txBody>
@@ -3297,8 +3475,8 @@
         </p:nvSpPr>
         <p:spPr>
           <a:xfrm>
-            <a:off x="1280160" y="9509760"/>
-            <a:ext cx="15544800" cy="548640"/>
+            <a:off x="10058400" y="3337560"/>
+            <a:ext cx="4572000" cy="1005840"/>
           </a:xfrm>
           <a:prstGeom prst="rect">
             <a:avLst/>
@@ -3306,7 +3484,7 @@
           <a:noFill/>
         </p:spPr>
         <p:txBody>
-          <a:bodyPr wrap="square" anchor="t" lIns="25400" rIns="25400" tIns="25400" bIns="25400">
+          <a:bodyPr wrap="square" anchor="ctr" lIns="50800" rIns="50800" tIns="25400" bIns="25400">
             <a:spAutoFit/>
           </a:bodyPr>
           <a:lstStyle/>
@@ -3318,13 +3496,1950 @@
               <a:buNone/>
             </a:pPr>
             <a:r>
-              <a:rPr sz="1300" b="0" i="1">
-                <a:solidFill>
-                  <a:srgbClr val="D8B0B0"/>
-                </a:solidFill>
-                <a:latin typeface="Open Sans"/>
-              </a:rPr>
-              <a:t>References: SatMAE++ (Noman et al., CVPR 2024) - RSP (ViTAE) - SAM / SAMRS</a:t>
+              <a:rPr sz="4000" b="1" i="0">
+                <a:solidFill>
+                  <a:srgbClr val="1F497D"/>
+                </a:solidFill>
+                <a:latin typeface="Open Sans"/>
+              </a:rPr>
+              <a:t>0.25</a:t>
+            </a:r>
+          </a:p>
+        </p:txBody>
+      </p:sp>
+      <p:sp>
+        <p:nvSpPr>
+          <p:cNvPr id="7" name="TextBox 6"/>
+          <p:cNvSpPr txBox="1"/>
+          <p:nvPr/>
+        </p:nvSpPr>
+        <p:spPr>
+          <a:xfrm>
+            <a:off x="1828800" y="4572000"/>
+            <a:ext cx="7772400" cy="1005840"/>
+          </a:xfrm>
+          <a:prstGeom prst="rect">
+            <a:avLst/>
+          </a:prstGeom>
+          <a:noFill/>
+        </p:spPr>
+        <p:txBody>
+          <a:bodyPr wrap="square" anchor="ctr" lIns="50800" rIns="50800" tIns="25400" bIns="25400">
+            <a:spAutoFit/>
+          </a:bodyPr>
+          <a:lstStyle/>
+          <a:p>
+            <a:pPr algn="l">
+              <a:spcAft>
+                <a:spcPts val="0"/>
+              </a:spcAft>
+              <a:buNone/>
+            </a:pPr>
+            <a:r>
+              <a:rPr sz="3400" b="1" i="0">
+                <a:solidFill>
+                  <a:srgbClr val="202020"/>
+                </a:solidFill>
+                <a:latin typeface="Open Sans"/>
+              </a:rPr>
+              <a:t>SatMAE++</a:t>
+            </a:r>
+          </a:p>
+        </p:txBody>
+      </p:sp>
+      <p:sp>
+        <p:nvSpPr>
+          <p:cNvPr id="8" name="TextBox 7"/>
+          <p:cNvSpPr txBox="1"/>
+          <p:nvPr/>
+        </p:nvSpPr>
+        <p:spPr>
+          <a:xfrm>
+            <a:off x="10058400" y="4572000"/>
+            <a:ext cx="4572000" cy="1005840"/>
+          </a:xfrm>
+          <a:prstGeom prst="rect">
+            <a:avLst/>
+          </a:prstGeom>
+          <a:noFill/>
+        </p:spPr>
+        <p:txBody>
+          <a:bodyPr wrap="square" anchor="ctr" lIns="50800" rIns="50800" tIns="25400" bIns="25400">
+            <a:spAutoFit/>
+          </a:bodyPr>
+          <a:lstStyle/>
+          <a:p>
+            <a:pPr algn="l">
+              <a:spcAft>
+                <a:spcPts val="0"/>
+              </a:spcAft>
+              <a:buNone/>
+            </a:pPr>
+            <a:r>
+              <a:rPr sz="4000" b="1" i="0">
+                <a:solidFill>
+                  <a:srgbClr val="2E7D32"/>
+                </a:solidFill>
+                <a:latin typeface="Open Sans"/>
+              </a:rPr>
+              <a:t>0.31</a:t>
+            </a:r>
+          </a:p>
+        </p:txBody>
+      </p:sp>
+      <p:sp>
+        <p:nvSpPr>
+          <p:cNvPr id="9" name="TextBox 8"/>
+          <p:cNvSpPr txBox="1"/>
+          <p:nvPr/>
+        </p:nvSpPr>
+        <p:spPr>
+          <a:xfrm>
+            <a:off x="1828800" y="6126480"/>
+            <a:ext cx="13716000" cy="1005840"/>
+          </a:xfrm>
+          <a:prstGeom prst="rect">
+            <a:avLst/>
+          </a:prstGeom>
+          <a:noFill/>
+        </p:spPr>
+        <p:txBody>
+          <a:bodyPr wrap="square" anchor="t" lIns="50800" rIns="50800" tIns="25400" bIns="25400">
+            <a:spAutoFit/>
+          </a:bodyPr>
+          <a:lstStyle/>
+          <a:p>
+            <a:pPr algn="l">
+              <a:spcAft>
+                <a:spcPts val="0"/>
+              </a:spcAft>
+              <a:buNone/>
+            </a:pPr>
+            <a:r>
+              <a:rPr sz="4000" b="1" i="0">
+                <a:solidFill>
+                  <a:srgbClr val="C01A2B"/>
+                </a:solidFill>
+                <a:latin typeface="Open Sans"/>
+              </a:rPr>
+              <a:t>+244% vs Scratch</a:t>
+            </a:r>
+          </a:p>
+        </p:txBody>
+      </p:sp>
+      <p:sp>
+        <p:nvSpPr>
+          <p:cNvPr id="10" name="TextBox 9"/>
+          <p:cNvSpPr txBox="1"/>
+          <p:nvPr/>
+        </p:nvSpPr>
+        <p:spPr>
+          <a:xfrm>
+            <a:off x="1828800" y="7315200"/>
+            <a:ext cx="15087600" cy="1280160"/>
+          </a:xfrm>
+          <a:prstGeom prst="rect">
+            <a:avLst/>
+          </a:prstGeom>
+          <a:noFill/>
+        </p:spPr>
+        <p:txBody>
+          <a:bodyPr wrap="square" anchor="ctr" lIns="50800" rIns="50800" tIns="25400" bIns="25400">
+            <a:spAutoFit/>
+          </a:bodyPr>
+          <a:lstStyle/>
+          <a:p>
+            <a:pPr algn="l">
+              <a:spcAft>
+                <a:spcPts val="0"/>
+              </a:spcAft>
+              <a:buNone/>
+            </a:pPr>
+            <a:r>
+              <a:rPr sz="2800" b="1" i="0">
+                <a:solidFill>
+                  <a:srgbClr val="6F0A19"/>
+                </a:solidFill>
+                <a:latin typeface="Open Sans"/>
+              </a:rPr>
+              <a:t>Frozen SatMAE++ beats Fine-Tuned Swin</a:t>
+            </a:r>
+          </a:p>
+        </p:txBody>
+      </p:sp>
+    </p:spTree>
+  </p:cSld>
+  <p:clrMapOvr>
+    <a:masterClrMapping/>
+  </p:clrMapOvr>
+</p:sld>
+</file>
+
+<file path=ppt/slides/slide11.xml><?xml version="1.0" encoding="utf-8"?>
+<p:sld xmlns:a="http://schemas.openxmlformats.org/drawingml/2006/main" xmlns:p="http://schemas.openxmlformats.org/presentationml/2006/main" xmlns:r="http://schemas.openxmlformats.org/officeDocument/2006/relationships">
+  <p:cSld>
+    <p:spTree>
+      <p:nvGrpSpPr>
+        <p:cNvPr id="1" name=""/>
+        <p:cNvGrpSpPr/>
+        <p:nvPr/>
+      </p:nvGrpSpPr>
+      <p:grpSpPr/>
+      <p:sp>
+        <p:nvSpPr>
+          <p:cNvPr id="2" name="TextBox 1"/>
+          <p:cNvSpPr txBox="1"/>
+          <p:nvPr/>
+        </p:nvSpPr>
+        <p:spPr>
+          <a:xfrm>
+            <a:off x="822960" y="457200"/>
+            <a:ext cx="16642080" cy="1280160"/>
+          </a:xfrm>
+          <a:prstGeom prst="rect">
+            <a:avLst/>
+          </a:prstGeom>
+          <a:noFill/>
+        </p:spPr>
+        <p:txBody>
+          <a:bodyPr wrap="square" anchor="t" lIns="50800" rIns="50800" tIns="25400" bIns="25400">
+            <a:spAutoFit/>
+          </a:bodyPr>
+          <a:lstStyle/>
+          <a:p>
+            <a:pPr algn="l">
+              <a:spcAft>
+                <a:spcPts val="0"/>
+              </a:spcAft>
+              <a:buNone/>
+            </a:pPr>
+            <a:r>
+              <a:rPr sz="4000" b="1" i="0">
+                <a:solidFill>
+                  <a:srgbClr val="6F0A19"/>
+                </a:solidFill>
+                <a:latin typeface="Open Sans"/>
+              </a:rPr>
+              <a:t>Why Does It Work?</a:t>
+            </a:r>
+          </a:p>
+        </p:txBody>
+      </p:sp>
+      <p:sp>
+        <p:nvSpPr>
+          <p:cNvPr id="3" name="TextBox 2"/>
+          <p:cNvSpPr txBox="1"/>
+          <p:nvPr/>
+        </p:nvSpPr>
+        <p:spPr>
+          <a:xfrm>
+            <a:off x="822960" y="2103120"/>
+            <a:ext cx="5852160" cy="5486400"/>
+          </a:xfrm>
+          <a:prstGeom prst="rect">
+            <a:avLst/>
+          </a:prstGeom>
+          <a:noFill/>
+        </p:spPr>
+        <p:txBody>
+          <a:bodyPr wrap="square" anchor="t" lIns="50800" rIns="50800" tIns="25400" bIns="25400">
+            <a:spAutoFit/>
+          </a:bodyPr>
+          <a:lstStyle/>
+          <a:p>
+            <a:pPr algn="l">
+              <a:spcAft>
+                <a:spcPts val="2200"/>
+              </a:spcAft>
+              <a:buNone/>
+            </a:pPr>
+            <a:r>
+              <a:rPr sz="3000" b="1" i="0">
+                <a:solidFill>
+                  <a:srgbClr val="6F0A19"/>
+                </a:solidFill>
+                <a:latin typeface="Open Sans"/>
+              </a:rPr>
+              <a:t>Better Features</a:t>
+            </a:r>
+          </a:p>
+          <a:p>
+            <a:pPr algn="l">
+              <a:spcAft>
+                <a:spcPts val="2200"/>
+              </a:spcAft>
+              <a:buNone/>
+            </a:pPr>
+            <a:r>
+              <a:rPr sz="3000" b="1" i="0">
+                <a:solidFill>
+                  <a:srgbClr val="6F0A19"/>
+                </a:solidFill>
+                <a:latin typeface="Open Sans"/>
+              </a:rPr>
+              <a:t>Better Semantics</a:t>
+            </a:r>
+          </a:p>
+          <a:p>
+            <a:pPr algn="l">
+              <a:spcAft>
+                <a:spcPts val="2200"/>
+              </a:spcAft>
+              <a:buNone/>
+            </a:pPr>
+            <a:r>
+              <a:rPr sz="3000" b="1" i="0">
+                <a:solidFill>
+                  <a:srgbClr val="6F0A19"/>
+                </a:solidFill>
+                <a:latin typeface="Open Sans"/>
+              </a:rPr>
+              <a:t>Better Generalization</a:t>
+            </a:r>
+          </a:p>
+        </p:txBody>
+      </p:sp>
+      <p:sp>
+        <p:nvSpPr>
+          <p:cNvPr id="4" name="Rounded Rectangle 3"/>
+          <p:cNvSpPr/>
+          <p:nvPr/>
+        </p:nvSpPr>
+        <p:spPr>
+          <a:xfrm>
+            <a:off x="6949440" y="1920240"/>
+            <a:ext cx="10424160" cy="6675120"/>
+          </a:xfrm>
+          <a:prstGeom prst="roundRect">
+            <a:avLst/>
+          </a:prstGeom>
+          <a:solidFill>
+            <a:srgbClr val="ECECEC"/>
+          </a:solidFill>
+          <a:ln w="15875">
+            <a:solidFill>
+              <a:srgbClr val="BCBCBC"/>
+            </a:solidFill>
+          </a:ln>
+          <a:effectLst/>
+        </p:spPr>
+        <p:style>
+          <a:lnRef idx="1">
+            <a:schemeClr val="accent1"/>
+          </a:lnRef>
+          <a:fillRef idx="3">
+            <a:schemeClr val="accent1"/>
+          </a:fillRef>
+          <a:effectRef idx="2">
+            <a:schemeClr val="accent1"/>
+          </a:effectRef>
+          <a:fontRef idx="minor">
+            <a:schemeClr val="lt1"/>
+          </a:fontRef>
+        </p:style>
+        <p:txBody>
+          <a:bodyPr rtlCol="0" anchor="ctr" wrap="square"/>
+          <a:lstStyle/>
+          <a:p>
+            <a:pPr algn="ctr"/>
+            <a:r>
+              <a:rPr sz="1500" i="1">
+                <a:solidFill>
+                  <a:srgbClr val="7A7A7A"/>
+                </a:solidFill>
+                <a:latin typeface="Open Sans"/>
+              </a:rPr>
+              <a:t>[ IMAGE: prediction  SatMAE++  vs  Scratch ]</a:t>
+            </a:r>
+          </a:p>
+        </p:txBody>
+      </p:sp>
+    </p:spTree>
+  </p:cSld>
+  <p:clrMapOvr>
+    <a:masterClrMapping/>
+  </p:clrMapOvr>
+</p:sld>
+</file>
+
+<file path=ppt/slides/slide12.xml><?xml version="1.0" encoding="utf-8"?>
+<p:sld xmlns:a="http://schemas.openxmlformats.org/drawingml/2006/main" xmlns:p="http://schemas.openxmlformats.org/presentationml/2006/main" xmlns:r="http://schemas.openxmlformats.org/officeDocument/2006/relationships">
+  <p:cSld>
+    <p:spTree>
+      <p:nvGrpSpPr>
+        <p:cNvPr id="1" name=""/>
+        <p:cNvGrpSpPr/>
+        <p:nvPr/>
+      </p:nvGrpSpPr>
+      <p:grpSpPr/>
+      <p:sp>
+        <p:nvSpPr>
+          <p:cNvPr id="2" name="TextBox 1"/>
+          <p:cNvSpPr txBox="1"/>
+          <p:nvPr/>
+        </p:nvSpPr>
+        <p:spPr>
+          <a:xfrm>
+            <a:off x="822960" y="457200"/>
+            <a:ext cx="16642080" cy="1280160"/>
+          </a:xfrm>
+          <a:prstGeom prst="rect">
+            <a:avLst/>
+          </a:prstGeom>
+          <a:noFill/>
+        </p:spPr>
+        <p:txBody>
+          <a:bodyPr wrap="square" anchor="t" lIns="50800" rIns="50800" tIns="25400" bIns="25400">
+            <a:spAutoFit/>
+          </a:bodyPr>
+          <a:lstStyle/>
+          <a:p>
+            <a:pPr algn="l">
+              <a:spcAft>
+                <a:spcPts val="0"/>
+              </a:spcAft>
+              <a:buNone/>
+            </a:pPr>
+            <a:r>
+              <a:rPr sz="4000" b="1" i="0">
+                <a:solidFill>
+                  <a:srgbClr val="6F0A19"/>
+                </a:solidFill>
+                <a:latin typeface="Open Sans"/>
+              </a:rPr>
+              <a:t>Wavelet Experiments</a:t>
+            </a:r>
+          </a:p>
+        </p:txBody>
+      </p:sp>
+      <p:sp>
+        <p:nvSpPr>
+          <p:cNvPr id="3" name="Rounded Rectangle 2"/>
+          <p:cNvSpPr/>
+          <p:nvPr/>
+        </p:nvSpPr>
+        <p:spPr>
+          <a:xfrm>
+            <a:off x="914400" y="1920240"/>
+            <a:ext cx="8229600" cy="6035040"/>
+          </a:xfrm>
+          <a:prstGeom prst="roundRect">
+            <a:avLst/>
+          </a:prstGeom>
+          <a:solidFill>
+            <a:srgbClr val="ECECEC"/>
+          </a:solidFill>
+          <a:ln w="15875">
+            <a:solidFill>
+              <a:srgbClr val="BCBCBC"/>
+            </a:solidFill>
+          </a:ln>
+          <a:effectLst/>
+        </p:spPr>
+        <p:style>
+          <a:lnRef idx="1">
+            <a:schemeClr val="accent1"/>
+          </a:lnRef>
+          <a:fillRef idx="3">
+            <a:schemeClr val="accent1"/>
+          </a:fillRef>
+          <a:effectRef idx="2">
+            <a:schemeClr val="accent1"/>
+          </a:effectRef>
+          <a:fontRef idx="minor">
+            <a:schemeClr val="lt1"/>
+          </a:fontRef>
+        </p:style>
+        <p:txBody>
+          <a:bodyPr rtlCol="0" anchor="ctr" wrap="square"/>
+          <a:lstStyle/>
+          <a:p>
+            <a:pPr algn="ctr"/>
+            <a:r>
+              <a:rPr sz="1500" i="1">
+                <a:solidFill>
+                  <a:srgbClr val="7A7A7A"/>
+                </a:solidFill>
+                <a:latin typeface="Open Sans"/>
+              </a:rPr>
+              <a:t>[ SCHEMA: wavelet branch ]</a:t>
+            </a:r>
+          </a:p>
+        </p:txBody>
+      </p:sp>
+      <p:sp>
+        <p:nvSpPr>
+          <p:cNvPr id="4" name="TextBox 3"/>
+          <p:cNvSpPr txBox="1"/>
+          <p:nvPr/>
+        </p:nvSpPr>
+        <p:spPr>
+          <a:xfrm>
+            <a:off x="9509760" y="1920240"/>
+            <a:ext cx="7863840" cy="6035040"/>
+          </a:xfrm>
+          <a:prstGeom prst="rect">
+            <a:avLst/>
+          </a:prstGeom>
+          <a:noFill/>
+        </p:spPr>
+        <p:txBody>
+          <a:bodyPr wrap="square" anchor="ctr" lIns="50800" rIns="50800" tIns="25400" bIns="25400">
+            <a:spAutoFit/>
+          </a:bodyPr>
+          <a:lstStyle/>
+          <a:p>
+            <a:pPr algn="l">
+              <a:spcAft>
+                <a:spcPts val="1400"/>
+              </a:spcAft>
+              <a:buNone/>
+            </a:pPr>
+            <a:r>
+              <a:rPr sz="4000" b="1" i="0">
+                <a:solidFill>
+                  <a:srgbClr val="6F0A19"/>
+                </a:solidFill>
+                <a:latin typeface="Open Sans"/>
+              </a:rPr>
+              <a:t>No Significant Gain</a:t>
+            </a:r>
+          </a:p>
+          <a:p>
+            <a:pPr algn="l">
+              <a:spcAft>
+                <a:spcPts val="0"/>
+              </a:spcAft>
+              <a:buNone/>
+            </a:pPr>
+            <a:r>
+              <a:rPr sz="2600" b="0" i="1">
+                <a:solidFill>
+                  <a:srgbClr val="7A7A7A"/>
+                </a:solidFill>
+                <a:latin typeface="Open Sans"/>
+              </a:rPr>
+              <a:t>mIoU ~= unchanged</a:t>
+            </a:r>
+          </a:p>
+        </p:txBody>
+      </p:sp>
+    </p:spTree>
+  </p:cSld>
+  <p:clrMapOvr>
+    <a:masterClrMapping/>
+  </p:clrMapOvr>
+</p:sld>
+</file>
+
+<file path=ppt/slides/slide13.xml><?xml version="1.0" encoding="utf-8"?>
+<p:sld xmlns:a="http://schemas.openxmlformats.org/drawingml/2006/main" xmlns:p="http://schemas.openxmlformats.org/presentationml/2006/main" xmlns:r="http://schemas.openxmlformats.org/officeDocument/2006/relationships">
+  <p:cSld>
+    <p:spTree>
+      <p:nvGrpSpPr>
+        <p:cNvPr id="1" name=""/>
+        <p:cNvGrpSpPr/>
+        <p:nvPr/>
+      </p:nvGrpSpPr>
+      <p:grpSpPr/>
+      <p:sp>
+        <p:nvSpPr>
+          <p:cNvPr id="2" name="Rectangle 1"/>
+          <p:cNvSpPr/>
+          <p:nvPr/>
+        </p:nvSpPr>
+        <p:spPr>
+          <a:xfrm>
+            <a:off x="0" y="0"/>
+            <a:ext cx="18288000" cy="10287000"/>
+          </a:xfrm>
+          <a:prstGeom prst="rect">
+            <a:avLst/>
+          </a:prstGeom>
+          <a:solidFill>
+            <a:srgbClr val="6F0A19"/>
+          </a:solidFill>
+          <a:ln>
+            <a:noFill/>
+          </a:ln>
+          <a:effectLst/>
+        </p:spPr>
+        <p:style>
+          <a:lnRef idx="1">
+            <a:schemeClr val="accent1"/>
+          </a:lnRef>
+          <a:fillRef idx="3">
+            <a:schemeClr val="accent1"/>
+          </a:fillRef>
+          <a:effectRef idx="2">
+            <a:schemeClr val="accent1"/>
+          </a:effectRef>
+          <a:fontRef idx="minor">
+            <a:schemeClr val="lt1"/>
+          </a:fontRef>
+        </p:style>
+        <p:txBody>
+          <a:bodyPr rtlCol="0" anchor="ctr"/>
+          <a:lstStyle/>
+          <a:p>
+            <a:pPr algn="ctr"/>
+          </a:p>
+        </p:txBody>
+      </p:sp>
+      <p:sp>
+        <p:nvSpPr>
+          <p:cNvPr id="3" name="TextBox 2"/>
+          <p:cNvSpPr txBox="1"/>
+          <p:nvPr/>
+        </p:nvSpPr>
+        <p:spPr>
+          <a:xfrm>
+            <a:off x="1097280" y="2926080"/>
+            <a:ext cx="16093440" cy="4206240"/>
+          </a:xfrm>
+          <a:prstGeom prst="rect">
+            <a:avLst/>
+          </a:prstGeom>
+          <a:noFill/>
+        </p:spPr>
+        <p:txBody>
+          <a:bodyPr wrap="square" anchor="ctr" lIns="50800" rIns="50800" tIns="25400" bIns="25400">
+            <a:spAutoFit/>
+          </a:bodyPr>
+          <a:lstStyle/>
+          <a:p>
+            <a:pPr algn="ctr">
+              <a:spcAft>
+                <a:spcPts val="1600"/>
+              </a:spcAft>
+              <a:buNone/>
+            </a:pPr>
+            <a:r>
+              <a:rPr sz="5200" b="1" i="0">
+                <a:solidFill>
+                  <a:srgbClr val="FFFFFF"/>
+                </a:solidFill>
+                <a:latin typeface="Open Sans"/>
+              </a:rPr>
+              <a:t>Edges are not the bottleneck.</a:t>
+            </a:r>
+          </a:p>
+          <a:p>
+            <a:pPr algn="ctr">
+              <a:spcAft>
+                <a:spcPts val="400"/>
+              </a:spcAft>
+              <a:buNone/>
+            </a:pPr>
+            <a:r>
+              <a:rPr sz="2600" b="0" i="0">
+                <a:solidFill>
+                  <a:srgbClr val="ECD2D2"/>
+                </a:solidFill>
+                <a:latin typeface="Open Sans"/>
+              </a:rPr>
+              <a:t>Semantics Matter More</a:t>
+            </a:r>
+          </a:p>
+        </p:txBody>
+      </p:sp>
+    </p:spTree>
+  </p:cSld>
+  <p:clrMapOvr>
+    <a:masterClrMapping/>
+  </p:clrMapOvr>
+</p:sld>
+</file>
+
+<file path=ppt/slides/slide14.xml><?xml version="1.0" encoding="utf-8"?>
+<p:sld xmlns:a="http://schemas.openxmlformats.org/drawingml/2006/main" xmlns:p="http://schemas.openxmlformats.org/presentationml/2006/main" xmlns:r="http://schemas.openxmlformats.org/officeDocument/2006/relationships">
+  <p:cSld>
+    <p:spTree>
+      <p:nvGrpSpPr>
+        <p:cNvPr id="1" name=""/>
+        <p:cNvGrpSpPr/>
+        <p:nvPr/>
+      </p:nvGrpSpPr>
+      <p:grpSpPr/>
+      <p:sp>
+        <p:nvSpPr>
+          <p:cNvPr id="2" name="Rectangle 1"/>
+          <p:cNvSpPr/>
+          <p:nvPr/>
+        </p:nvSpPr>
+        <p:spPr>
+          <a:xfrm>
+            <a:off x="0" y="0"/>
+            <a:ext cx="18288000" cy="10287000"/>
+          </a:xfrm>
+          <a:prstGeom prst="rect">
+            <a:avLst/>
+          </a:prstGeom>
+          <a:solidFill>
+            <a:srgbClr val="6F0A19"/>
+          </a:solidFill>
+          <a:ln>
+            <a:noFill/>
+          </a:ln>
+          <a:effectLst/>
+        </p:spPr>
+        <p:style>
+          <a:lnRef idx="1">
+            <a:schemeClr val="accent1"/>
+          </a:lnRef>
+          <a:fillRef idx="3">
+            <a:schemeClr val="accent1"/>
+          </a:fillRef>
+          <a:effectRef idx="2">
+            <a:schemeClr val="accent1"/>
+          </a:effectRef>
+          <a:fontRef idx="minor">
+            <a:schemeClr val="lt1"/>
+          </a:fontRef>
+        </p:style>
+        <p:txBody>
+          <a:bodyPr rtlCol="0" anchor="ctr"/>
+          <a:lstStyle/>
+          <a:p>
+            <a:pPr algn="ctr"/>
+          </a:p>
+        </p:txBody>
+      </p:sp>
+      <p:sp>
+        <p:nvSpPr>
+          <p:cNvPr id="3" name="TextBox 2"/>
+          <p:cNvSpPr txBox="1"/>
+          <p:nvPr/>
+        </p:nvSpPr>
+        <p:spPr>
+          <a:xfrm>
+            <a:off x="1097280" y="2926080"/>
+            <a:ext cx="16093440" cy="4206240"/>
+          </a:xfrm>
+          <a:prstGeom prst="rect">
+            <a:avLst/>
+          </a:prstGeom>
+          <a:noFill/>
+        </p:spPr>
+        <p:txBody>
+          <a:bodyPr wrap="square" anchor="ctr" lIns="50800" rIns="50800" tIns="25400" bIns="25400">
+            <a:spAutoFit/>
+          </a:bodyPr>
+          <a:lstStyle/>
+          <a:p>
+            <a:pPr algn="ctr">
+              <a:spcAft>
+                <a:spcPts val="1600"/>
+              </a:spcAft>
+              <a:buNone/>
+            </a:pPr>
+            <a:r>
+              <a:rPr sz="5200" b="1" i="0">
+                <a:solidFill>
+                  <a:srgbClr val="FFFFFF"/>
+                </a:solidFill>
+                <a:latin typeface="Open Sans"/>
+              </a:rPr>
+              <a:t>Task 2</a:t>
+            </a:r>
+          </a:p>
+          <a:p>
+            <a:pPr algn="ctr">
+              <a:spcAft>
+                <a:spcPts val="400"/>
+              </a:spcAft>
+              <a:buNone/>
+            </a:pPr>
+            <a:r>
+              <a:rPr sz="2600" b="0" i="0">
+                <a:solidFill>
+                  <a:srgbClr val="ECD2D2"/>
+                </a:solidFill>
+                <a:latin typeface="Open Sans"/>
+              </a:rPr>
+              <a:t>Multispectral Segmentation</a:t>
+            </a:r>
+          </a:p>
+        </p:txBody>
+      </p:sp>
+      <p:sp>
+        <p:nvSpPr>
+          <p:cNvPr id="4" name="Rounded Rectangle 3"/>
+          <p:cNvSpPr/>
+          <p:nvPr/>
+        </p:nvSpPr>
+        <p:spPr>
+          <a:xfrm>
+            <a:off x="3657600" y="6949440"/>
+            <a:ext cx="10972800" cy="2377440"/>
+          </a:xfrm>
+          <a:prstGeom prst="roundRect">
+            <a:avLst/>
+          </a:prstGeom>
+          <a:solidFill>
+            <a:srgbClr val="ECECEC"/>
+          </a:solidFill>
+          <a:ln w="15875">
+            <a:solidFill>
+              <a:srgbClr val="BCBCBC"/>
+            </a:solidFill>
+          </a:ln>
+          <a:effectLst/>
+        </p:spPr>
+        <p:style>
+          <a:lnRef idx="1">
+            <a:schemeClr val="accent1"/>
+          </a:lnRef>
+          <a:fillRef idx="3">
+            <a:schemeClr val="accent1"/>
+          </a:fillRef>
+          <a:effectRef idx="2">
+            <a:schemeClr val="accent1"/>
+          </a:effectRef>
+          <a:fontRef idx="minor">
+            <a:schemeClr val="lt1"/>
+          </a:fontRef>
+        </p:style>
+        <p:txBody>
+          <a:bodyPr rtlCol="0" anchor="ctr" wrap="square"/>
+          <a:lstStyle/>
+          <a:p>
+            <a:pPr algn="ctr"/>
+            <a:r>
+              <a:rPr sz="1500" i="1">
+                <a:solidFill>
+                  <a:srgbClr val="7A7A7A"/>
+                </a:solidFill>
+                <a:latin typeface="Open Sans"/>
+              </a:rPr>
+              <a:t>[ IMAGE: Sentinel-2  +  Sentinel-1 ]</a:t>
+            </a:r>
+          </a:p>
+        </p:txBody>
+      </p:sp>
+    </p:spTree>
+  </p:cSld>
+  <p:clrMapOvr>
+    <a:masterClrMapping/>
+  </p:clrMapOvr>
+</p:sld>
+</file>
+
+<file path=ppt/slides/slide15.xml><?xml version="1.0" encoding="utf-8"?>
+<p:sld xmlns:a="http://schemas.openxmlformats.org/drawingml/2006/main" xmlns:p="http://schemas.openxmlformats.org/presentationml/2006/main" xmlns:r="http://schemas.openxmlformats.org/officeDocument/2006/relationships">
+  <p:cSld>
+    <p:spTree>
+      <p:nvGrpSpPr>
+        <p:cNvPr id="1" name=""/>
+        <p:cNvGrpSpPr/>
+        <p:nvPr/>
+      </p:nvGrpSpPr>
+      <p:grpSpPr/>
+      <p:sp>
+        <p:nvSpPr>
+          <p:cNvPr id="2" name="TextBox 1"/>
+          <p:cNvSpPr txBox="1"/>
+          <p:nvPr/>
+        </p:nvSpPr>
+        <p:spPr>
+          <a:xfrm>
+            <a:off x="822960" y="457200"/>
+            <a:ext cx="16642080" cy="1280160"/>
+          </a:xfrm>
+          <a:prstGeom prst="rect">
+            <a:avLst/>
+          </a:prstGeom>
+          <a:noFill/>
+        </p:spPr>
+        <p:txBody>
+          <a:bodyPr wrap="square" anchor="t" lIns="50800" rIns="50800" tIns="25400" bIns="25400">
+            <a:spAutoFit/>
+          </a:bodyPr>
+          <a:lstStyle/>
+          <a:p>
+            <a:pPr algn="l">
+              <a:spcAft>
+                <a:spcPts val="0"/>
+              </a:spcAft>
+              <a:buNone/>
+            </a:pPr>
+            <a:r>
+              <a:rPr sz="4000" b="1" i="0">
+                <a:solidFill>
+                  <a:srgbClr val="6F0A19"/>
+                </a:solidFill>
+                <a:latin typeface="Open Sans"/>
+              </a:rPr>
+              <a:t>Optical + SAR</a:t>
+            </a:r>
+          </a:p>
+        </p:txBody>
+      </p:sp>
+      <p:sp>
+        <p:nvSpPr>
+          <p:cNvPr id="3" name="Rounded Rectangle 2"/>
+          <p:cNvSpPr/>
+          <p:nvPr/>
+        </p:nvSpPr>
+        <p:spPr>
+          <a:xfrm>
+            <a:off x="1097280" y="2103120"/>
+            <a:ext cx="7315200" cy="4206240"/>
+          </a:xfrm>
+          <a:prstGeom prst="roundRect">
+            <a:avLst/>
+          </a:prstGeom>
+          <a:solidFill>
+            <a:srgbClr val="F4ECEC"/>
+          </a:solidFill>
+          <a:ln w="19050">
+            <a:solidFill>
+              <a:srgbClr val="6F0A19"/>
+            </a:solidFill>
+          </a:ln>
+          <a:effectLst/>
+        </p:spPr>
+        <p:style>
+          <a:lnRef idx="1">
+            <a:schemeClr val="accent1"/>
+          </a:lnRef>
+          <a:fillRef idx="3">
+            <a:schemeClr val="accent1"/>
+          </a:fillRef>
+          <a:effectRef idx="2">
+            <a:schemeClr val="accent1"/>
+          </a:effectRef>
+          <a:fontRef idx="minor">
+            <a:schemeClr val="lt1"/>
+          </a:fontRef>
+        </p:style>
+        <p:txBody>
+          <a:bodyPr rtlCol="0" anchor="ctr"/>
+          <a:lstStyle/>
+          <a:p>
+            <a:pPr algn="ctr">
+              <a:spcAft>
+                <a:spcPts val="800"/>
+              </a:spcAft>
+              <a:buNone/>
+            </a:pPr>
+            <a:r>
+              <a:rPr sz="3200" b="1" i="0">
+                <a:solidFill>
+                  <a:srgbClr val="6F0A19"/>
+                </a:solidFill>
+                <a:latin typeface="Open Sans"/>
+              </a:rPr>
+              <a:t>Optical (S2)</a:t>
+            </a:r>
+          </a:p>
+          <a:p>
+            <a:pPr algn="ctr">
+              <a:spcAft>
+                <a:spcPts val="0"/>
+              </a:spcAft>
+              <a:buNone/>
+            </a:pPr>
+            <a:r>
+              <a:rPr sz="2600" b="0" i="0">
+                <a:solidFill>
+                  <a:srgbClr val="202020"/>
+                </a:solidFill>
+                <a:latin typeface="Open Sans"/>
+              </a:rPr>
+              <a:t>13 Bands</a:t>
+            </a:r>
+          </a:p>
+        </p:txBody>
+      </p:sp>
+      <p:sp>
+        <p:nvSpPr>
+          <p:cNvPr id="4" name="Rounded Rectangle 3"/>
+          <p:cNvSpPr/>
+          <p:nvPr/>
+        </p:nvSpPr>
+        <p:spPr>
+          <a:xfrm>
+            <a:off x="9144000" y="2103120"/>
+            <a:ext cx="7315200" cy="4206240"/>
+          </a:xfrm>
+          <a:prstGeom prst="roundRect">
+            <a:avLst/>
+          </a:prstGeom>
+          <a:solidFill>
+            <a:srgbClr val="F4ECEC"/>
+          </a:solidFill>
+          <a:ln w="19050">
+            <a:solidFill>
+              <a:srgbClr val="6F0A19"/>
+            </a:solidFill>
+          </a:ln>
+          <a:effectLst/>
+        </p:spPr>
+        <p:style>
+          <a:lnRef idx="1">
+            <a:schemeClr val="accent1"/>
+          </a:lnRef>
+          <a:fillRef idx="3">
+            <a:schemeClr val="accent1"/>
+          </a:fillRef>
+          <a:effectRef idx="2">
+            <a:schemeClr val="accent1"/>
+          </a:effectRef>
+          <a:fontRef idx="minor">
+            <a:schemeClr val="lt1"/>
+          </a:fontRef>
+        </p:style>
+        <p:txBody>
+          <a:bodyPr rtlCol="0" anchor="ctr"/>
+          <a:lstStyle/>
+          <a:p>
+            <a:pPr algn="ctr">
+              <a:spcAft>
+                <a:spcPts val="800"/>
+              </a:spcAft>
+              <a:buNone/>
+            </a:pPr>
+            <a:r>
+              <a:rPr sz="3200" b="1" i="0">
+                <a:solidFill>
+                  <a:srgbClr val="6F0A19"/>
+                </a:solidFill>
+                <a:latin typeface="Open Sans"/>
+              </a:rPr>
+              <a:t>SAR (S1)</a:t>
+            </a:r>
+          </a:p>
+          <a:p>
+            <a:pPr algn="ctr">
+              <a:spcAft>
+                <a:spcPts val="0"/>
+              </a:spcAft>
+              <a:buNone/>
+            </a:pPr>
+            <a:r>
+              <a:rPr sz="2600" b="0" i="0">
+                <a:solidFill>
+                  <a:srgbClr val="202020"/>
+                </a:solidFill>
+                <a:latin typeface="Open Sans"/>
+              </a:rPr>
+              <a:t>2 Bands</a:t>
+            </a:r>
+          </a:p>
+        </p:txBody>
+      </p:sp>
+      <p:sp>
+        <p:nvSpPr>
+          <p:cNvPr id="5" name="TextBox 4"/>
+          <p:cNvSpPr txBox="1"/>
+          <p:nvPr/>
+        </p:nvSpPr>
+        <p:spPr>
+          <a:xfrm>
+            <a:off x="914400" y="6766560"/>
+            <a:ext cx="16459200" cy="1280160"/>
+          </a:xfrm>
+          <a:prstGeom prst="rect">
+            <a:avLst/>
+          </a:prstGeom>
+          <a:noFill/>
+        </p:spPr>
+        <p:txBody>
+          <a:bodyPr wrap="square" anchor="ctr" lIns="50800" rIns="50800" tIns="25400" bIns="25400">
+            <a:spAutoFit/>
+          </a:bodyPr>
+          <a:lstStyle/>
+          <a:p>
+            <a:pPr algn="ctr">
+              <a:spcAft>
+                <a:spcPts val="0"/>
+              </a:spcAft>
+              <a:buNone/>
+            </a:pPr>
+            <a:r>
+              <a:rPr sz="3000" b="1" i="0">
+                <a:solidFill>
+                  <a:srgbClr val="1F497D"/>
+                </a:solidFill>
+                <a:latin typeface="Open Sans"/>
+              </a:rPr>
+              <a:t>Dual-Modal Learning</a:t>
+            </a:r>
+          </a:p>
+        </p:txBody>
+      </p:sp>
+    </p:spTree>
+  </p:cSld>
+  <p:clrMapOvr>
+    <a:masterClrMapping/>
+  </p:clrMapOvr>
+</p:sld>
+</file>
+
+<file path=ppt/slides/slide16.xml><?xml version="1.0" encoding="utf-8"?>
+<p:sld xmlns:a="http://schemas.openxmlformats.org/drawingml/2006/main" xmlns:p="http://schemas.openxmlformats.org/presentationml/2006/main" xmlns:r="http://schemas.openxmlformats.org/officeDocument/2006/relationships">
+  <p:cSld>
+    <p:spTree>
+      <p:nvGrpSpPr>
+        <p:cNvPr id="1" name=""/>
+        <p:cNvGrpSpPr/>
+        <p:nvPr/>
+      </p:nvGrpSpPr>
+      <p:grpSpPr/>
+      <p:sp>
+        <p:nvSpPr>
+          <p:cNvPr id="2" name="TextBox 1"/>
+          <p:cNvSpPr txBox="1"/>
+          <p:nvPr/>
+        </p:nvSpPr>
+        <p:spPr>
+          <a:xfrm>
+            <a:off x="822960" y="457200"/>
+            <a:ext cx="16642080" cy="1280160"/>
+          </a:xfrm>
+          <a:prstGeom prst="rect">
+            <a:avLst/>
+          </a:prstGeom>
+          <a:noFill/>
+        </p:spPr>
+        <p:txBody>
+          <a:bodyPr wrap="square" anchor="t" lIns="50800" rIns="50800" tIns="25400" bIns="25400">
+            <a:spAutoFit/>
+          </a:bodyPr>
+          <a:lstStyle/>
+          <a:p>
+            <a:pPr algn="l">
+              <a:spcAft>
+                <a:spcPts val="0"/>
+              </a:spcAft>
+              <a:buNone/>
+            </a:pPr>
+            <a:r>
+              <a:rPr sz="4000" b="1" i="0">
+                <a:solidFill>
+                  <a:srgbClr val="6F0A19"/>
+                </a:solidFill>
+                <a:latin typeface="Open Sans"/>
+              </a:rPr>
+              <a:t>DFC2020 Results</a:t>
+            </a:r>
+          </a:p>
+        </p:txBody>
+      </p:sp>
+      <p:sp>
+        <p:nvSpPr>
+          <p:cNvPr id="3" name="TextBox 2"/>
+          <p:cNvSpPr txBox="1"/>
+          <p:nvPr/>
+        </p:nvSpPr>
+        <p:spPr>
+          <a:xfrm>
+            <a:off x="1828800" y="2194560"/>
+            <a:ext cx="8686800" cy="1005840"/>
+          </a:xfrm>
+          <a:prstGeom prst="rect">
+            <a:avLst/>
+          </a:prstGeom>
+          <a:noFill/>
+        </p:spPr>
+        <p:txBody>
+          <a:bodyPr wrap="square" anchor="ctr" lIns="50800" rIns="50800" tIns="25400" bIns="25400">
+            <a:spAutoFit/>
+          </a:bodyPr>
+          <a:lstStyle/>
+          <a:p>
+            <a:pPr algn="l">
+              <a:spcAft>
+                <a:spcPts val="0"/>
+              </a:spcAft>
+              <a:buNone/>
+            </a:pPr>
+            <a:r>
+              <a:rPr sz="3200" b="1" i="0">
+                <a:solidFill>
+                  <a:srgbClr val="202020"/>
+                </a:solidFill>
+                <a:latin typeface="Open Sans"/>
+              </a:rPr>
+              <a:t>Random</a:t>
+            </a:r>
+          </a:p>
+        </p:txBody>
+      </p:sp>
+      <p:sp>
+        <p:nvSpPr>
+          <p:cNvPr id="4" name="TextBox 3"/>
+          <p:cNvSpPr txBox="1"/>
+          <p:nvPr/>
+        </p:nvSpPr>
+        <p:spPr>
+          <a:xfrm>
+            <a:off x="10972800" y="2194560"/>
+            <a:ext cx="4572000" cy="1005840"/>
+          </a:xfrm>
+          <a:prstGeom prst="rect">
+            <a:avLst/>
+          </a:prstGeom>
+          <a:noFill/>
+        </p:spPr>
+        <p:txBody>
+          <a:bodyPr wrap="square" anchor="ctr" lIns="50800" rIns="50800" tIns="25400" bIns="25400">
+            <a:spAutoFit/>
+          </a:bodyPr>
+          <a:lstStyle/>
+          <a:p>
+            <a:pPr algn="l">
+              <a:spcAft>
+                <a:spcPts val="0"/>
+              </a:spcAft>
+              <a:buNone/>
+            </a:pPr>
+            <a:r>
+              <a:rPr sz="3800" b="1" i="0">
+                <a:solidFill>
+                  <a:srgbClr val="7A7A7A"/>
+                </a:solidFill>
+                <a:latin typeface="Open Sans"/>
+              </a:rPr>
+              <a:t>0.488</a:t>
+            </a:r>
+          </a:p>
+        </p:txBody>
+      </p:sp>
+      <p:sp>
+        <p:nvSpPr>
+          <p:cNvPr id="5" name="TextBox 4"/>
+          <p:cNvSpPr txBox="1"/>
+          <p:nvPr/>
+        </p:nvSpPr>
+        <p:spPr>
+          <a:xfrm>
+            <a:off x="1828800" y="3429000"/>
+            <a:ext cx="8686800" cy="1005840"/>
+          </a:xfrm>
+          <a:prstGeom prst="rect">
+            <a:avLst/>
+          </a:prstGeom>
+          <a:noFill/>
+        </p:spPr>
+        <p:txBody>
+          <a:bodyPr wrap="square" anchor="ctr" lIns="50800" rIns="50800" tIns="25400" bIns="25400">
+            <a:spAutoFit/>
+          </a:bodyPr>
+          <a:lstStyle/>
+          <a:p>
+            <a:pPr algn="l">
+              <a:spcAft>
+                <a:spcPts val="0"/>
+              </a:spcAft>
+              <a:buNone/>
+            </a:pPr>
+            <a:r>
+              <a:rPr sz="3200" b="1" i="0">
+                <a:solidFill>
+                  <a:srgbClr val="202020"/>
+                </a:solidFill>
+                <a:latin typeface="Open Sans"/>
+              </a:rPr>
+              <a:t>SatMAE++</a:t>
+            </a:r>
+          </a:p>
+        </p:txBody>
+      </p:sp>
+      <p:sp>
+        <p:nvSpPr>
+          <p:cNvPr id="6" name="TextBox 5"/>
+          <p:cNvSpPr txBox="1"/>
+          <p:nvPr/>
+        </p:nvSpPr>
+        <p:spPr>
+          <a:xfrm>
+            <a:off x="10972800" y="3429000"/>
+            <a:ext cx="4572000" cy="1005840"/>
+          </a:xfrm>
+          <a:prstGeom prst="rect">
+            <a:avLst/>
+          </a:prstGeom>
+          <a:noFill/>
+        </p:spPr>
+        <p:txBody>
+          <a:bodyPr wrap="square" anchor="ctr" lIns="50800" rIns="50800" tIns="25400" bIns="25400">
+            <a:spAutoFit/>
+          </a:bodyPr>
+          <a:lstStyle/>
+          <a:p>
+            <a:pPr algn="l">
+              <a:spcAft>
+                <a:spcPts val="0"/>
+              </a:spcAft>
+              <a:buNone/>
+            </a:pPr>
+            <a:r>
+              <a:rPr sz="3800" b="1" i="0">
+                <a:solidFill>
+                  <a:srgbClr val="2E7D32"/>
+                </a:solidFill>
+                <a:latin typeface="Open Sans"/>
+              </a:rPr>
+              <a:t>0.536</a:t>
+            </a:r>
+          </a:p>
+        </p:txBody>
+      </p:sp>
+      <p:sp>
+        <p:nvSpPr>
+          <p:cNvPr id="7" name="TextBox 6"/>
+          <p:cNvSpPr txBox="1"/>
+          <p:nvPr/>
+        </p:nvSpPr>
+        <p:spPr>
+          <a:xfrm>
+            <a:off x="1828800" y="4663440"/>
+            <a:ext cx="8686800" cy="1005840"/>
+          </a:xfrm>
+          <a:prstGeom prst="rect">
+            <a:avLst/>
+          </a:prstGeom>
+          <a:noFill/>
+        </p:spPr>
+        <p:txBody>
+          <a:bodyPr wrap="square" anchor="ctr" lIns="50800" rIns="50800" tIns="25400" bIns="25400">
+            <a:spAutoFit/>
+          </a:bodyPr>
+          <a:lstStyle/>
+          <a:p>
+            <a:pPr algn="l">
+              <a:spcAft>
+                <a:spcPts val="0"/>
+              </a:spcAft>
+              <a:buNone/>
+            </a:pPr>
+            <a:r>
+              <a:rPr sz="3200" b="1" i="0">
+                <a:solidFill>
+                  <a:srgbClr val="202020"/>
+                </a:solidFill>
+                <a:latin typeface="Open Sans"/>
+              </a:rPr>
+              <a:t>SatMAE++ + SAR</a:t>
+            </a:r>
+          </a:p>
+        </p:txBody>
+      </p:sp>
+      <p:sp>
+        <p:nvSpPr>
+          <p:cNvPr id="8" name="TextBox 7"/>
+          <p:cNvSpPr txBox="1"/>
+          <p:nvPr/>
+        </p:nvSpPr>
+        <p:spPr>
+          <a:xfrm>
+            <a:off x="10972800" y="4663440"/>
+            <a:ext cx="4572000" cy="1005840"/>
+          </a:xfrm>
+          <a:prstGeom prst="rect">
+            <a:avLst/>
+          </a:prstGeom>
+          <a:noFill/>
+        </p:spPr>
+        <p:txBody>
+          <a:bodyPr wrap="square" anchor="ctr" lIns="50800" rIns="50800" tIns="25400" bIns="25400">
+            <a:spAutoFit/>
+          </a:bodyPr>
+          <a:lstStyle/>
+          <a:p>
+            <a:pPr algn="l">
+              <a:spcAft>
+                <a:spcPts val="0"/>
+              </a:spcAft>
+              <a:buNone/>
+            </a:pPr>
+            <a:r>
+              <a:rPr sz="3800" b="1" i="0">
+                <a:solidFill>
+                  <a:srgbClr val="1F497D"/>
+                </a:solidFill>
+                <a:latin typeface="Open Sans"/>
+              </a:rPr>
+              <a:t>~0.53</a:t>
+            </a:r>
+          </a:p>
+        </p:txBody>
+      </p:sp>
+      <p:sp>
+        <p:nvSpPr>
+          <p:cNvPr id="9" name="TextBox 8"/>
+          <p:cNvSpPr txBox="1"/>
+          <p:nvPr/>
+        </p:nvSpPr>
+        <p:spPr>
+          <a:xfrm>
+            <a:off x="1828800" y="6766560"/>
+            <a:ext cx="15087600" cy="1280160"/>
+          </a:xfrm>
+          <a:prstGeom prst="rect">
+            <a:avLst/>
+          </a:prstGeom>
+          <a:noFill/>
+        </p:spPr>
+        <p:txBody>
+          <a:bodyPr wrap="square" anchor="ctr" lIns="50800" rIns="50800" tIns="25400" bIns="25400">
+            <a:spAutoFit/>
+          </a:bodyPr>
+          <a:lstStyle/>
+          <a:p>
+            <a:pPr algn="l">
+              <a:spcAft>
+                <a:spcPts val="0"/>
+              </a:spcAft>
+              <a:buNone/>
+            </a:pPr>
+            <a:r>
+              <a:rPr sz="3600" b="1" i="0">
+                <a:solidFill>
+                  <a:srgbClr val="6F0A19"/>
+                </a:solidFill>
+                <a:latin typeface="Open Sans"/>
+              </a:rPr>
+              <a:t>Pretraining Helps Again</a:t>
+            </a:r>
+          </a:p>
+        </p:txBody>
+      </p:sp>
+    </p:spTree>
+  </p:cSld>
+  <p:clrMapOvr>
+    <a:masterClrMapping/>
+  </p:clrMapOvr>
+</p:sld>
+</file>
+
+<file path=ppt/slides/slide17.xml><?xml version="1.0" encoding="utf-8"?>
+<p:sld xmlns:a="http://schemas.openxmlformats.org/drawingml/2006/main" xmlns:p="http://schemas.openxmlformats.org/presentationml/2006/main" xmlns:r="http://schemas.openxmlformats.org/officeDocument/2006/relationships">
+  <p:cSld>
+    <p:spTree>
+      <p:nvGrpSpPr>
+        <p:cNvPr id="1" name=""/>
+        <p:cNvGrpSpPr/>
+        <p:nvPr/>
+      </p:nvGrpSpPr>
+      <p:grpSpPr/>
+      <p:sp>
+        <p:nvSpPr>
+          <p:cNvPr id="2" name="TextBox 1"/>
+          <p:cNvSpPr txBox="1"/>
+          <p:nvPr/>
+        </p:nvSpPr>
+        <p:spPr>
+          <a:xfrm>
+            <a:off x="822960" y="457200"/>
+            <a:ext cx="16642080" cy="1280160"/>
+          </a:xfrm>
+          <a:prstGeom prst="rect">
+            <a:avLst/>
+          </a:prstGeom>
+          <a:noFill/>
+        </p:spPr>
+        <p:txBody>
+          <a:bodyPr wrap="square" anchor="t" lIns="50800" rIns="50800" tIns="25400" bIns="25400">
+            <a:spAutoFit/>
+          </a:bodyPr>
+          <a:lstStyle/>
+          <a:p>
+            <a:pPr algn="l">
+              <a:spcAft>
+                <a:spcPts val="0"/>
+              </a:spcAft>
+              <a:buNone/>
+            </a:pPr>
+            <a:r>
+              <a:rPr sz="4000" b="1" i="0">
+                <a:solidFill>
+                  <a:srgbClr val="6F0A19"/>
+                </a:solidFill>
+                <a:latin typeface="Open Sans"/>
+              </a:rPr>
+              <a:t>What Did SAR Add?</a:t>
+            </a:r>
+          </a:p>
+        </p:txBody>
+      </p:sp>
+      <p:sp>
+        <p:nvSpPr>
+          <p:cNvPr id="3" name="TextBox 2"/>
+          <p:cNvSpPr txBox="1"/>
+          <p:nvPr/>
+        </p:nvSpPr>
+        <p:spPr>
+          <a:xfrm>
+            <a:off x="822960" y="2103120"/>
+            <a:ext cx="6035040" cy="4572000"/>
+          </a:xfrm>
+          <a:prstGeom prst="rect">
+            <a:avLst/>
+          </a:prstGeom>
+          <a:noFill/>
+        </p:spPr>
+        <p:txBody>
+          <a:bodyPr wrap="square" anchor="ctr" lIns="50800" rIns="50800" tIns="25400" bIns="25400">
+            <a:spAutoFit/>
+          </a:bodyPr>
+          <a:lstStyle/>
+          <a:p>
+            <a:pPr algn="l">
+              <a:spcAft>
+                <a:spcPts val="0"/>
+              </a:spcAft>
+              <a:buNone/>
+            </a:pPr>
+            <a:r>
+              <a:rPr sz="3800" b="1" i="0">
+                <a:solidFill>
+                  <a:srgbClr val="6F0A19"/>
+                </a:solidFill>
+                <a:latin typeface="Open Sans"/>
+              </a:rPr>
+              <a:t>Better Water Detection</a:t>
+            </a:r>
+          </a:p>
+        </p:txBody>
+      </p:sp>
+      <p:sp>
+        <p:nvSpPr>
+          <p:cNvPr id="4" name="Rounded Rectangle 3"/>
+          <p:cNvSpPr/>
+          <p:nvPr/>
+        </p:nvSpPr>
+        <p:spPr>
+          <a:xfrm>
+            <a:off x="7132320" y="1920240"/>
+            <a:ext cx="10241280" cy="6675120"/>
+          </a:xfrm>
+          <a:prstGeom prst="roundRect">
+            <a:avLst/>
+          </a:prstGeom>
+          <a:solidFill>
+            <a:srgbClr val="ECECEC"/>
+          </a:solidFill>
+          <a:ln w="15875">
+            <a:solidFill>
+              <a:srgbClr val="BCBCBC"/>
+            </a:solidFill>
+          </a:ln>
+          <a:effectLst/>
+        </p:spPr>
+        <p:style>
+          <a:lnRef idx="1">
+            <a:schemeClr val="accent1"/>
+          </a:lnRef>
+          <a:fillRef idx="3">
+            <a:schemeClr val="accent1"/>
+          </a:fillRef>
+          <a:effectRef idx="2">
+            <a:schemeClr val="accent1"/>
+          </a:effectRef>
+          <a:fontRef idx="minor">
+            <a:schemeClr val="lt1"/>
+          </a:fontRef>
+        </p:style>
+        <p:txBody>
+          <a:bodyPr rtlCol="0" anchor="ctr" wrap="square"/>
+          <a:lstStyle/>
+          <a:p>
+            <a:pPr algn="ctr"/>
+            <a:r>
+              <a:rPr sz="1500" i="1">
+                <a:solidFill>
+                  <a:srgbClr val="7A7A7A"/>
+                </a:solidFill>
+                <a:latin typeface="Open Sans"/>
+              </a:rPr>
+              <a:t>[ IMAGE: water segmentation ]</a:t>
+            </a:r>
+          </a:p>
+        </p:txBody>
+      </p:sp>
+    </p:spTree>
+  </p:cSld>
+  <p:clrMapOvr>
+    <a:masterClrMapping/>
+  </p:clrMapOvr>
+</p:sld>
+</file>
+
+<file path=ppt/slides/slide18.xml><?xml version="1.0" encoding="utf-8"?>
+<p:sld xmlns:a="http://schemas.openxmlformats.org/drawingml/2006/main" xmlns:p="http://schemas.openxmlformats.org/presentationml/2006/main" xmlns:r="http://schemas.openxmlformats.org/officeDocument/2006/relationships">
+  <p:cSld>
+    <p:spTree>
+      <p:nvGrpSpPr>
+        <p:cNvPr id="1" name=""/>
+        <p:cNvGrpSpPr/>
+        <p:nvPr/>
+      </p:nvGrpSpPr>
+      <p:grpSpPr/>
+      <p:sp>
+        <p:nvSpPr>
+          <p:cNvPr id="2" name="TextBox 1"/>
+          <p:cNvSpPr txBox="1"/>
+          <p:nvPr/>
+        </p:nvSpPr>
+        <p:spPr>
+          <a:xfrm>
+            <a:off x="822960" y="457200"/>
+            <a:ext cx="16642080" cy="1280160"/>
+          </a:xfrm>
+          <a:prstGeom prst="rect">
+            <a:avLst/>
+          </a:prstGeom>
+          <a:noFill/>
+        </p:spPr>
+        <p:txBody>
+          <a:bodyPr wrap="square" anchor="t" lIns="50800" rIns="50800" tIns="25400" bIns="25400">
+            <a:spAutoFit/>
+          </a:bodyPr>
+          <a:lstStyle/>
+          <a:p>
+            <a:pPr algn="l">
+              <a:spcAft>
+                <a:spcPts val="0"/>
+              </a:spcAft>
+              <a:buNone/>
+            </a:pPr>
+            <a:r>
+              <a:rPr sz="4000" b="1" i="0">
+                <a:solidFill>
+                  <a:srgbClr val="6F0A19"/>
+                </a:solidFill>
+                <a:latin typeface="Open Sans"/>
+              </a:rPr>
+              <a:t>Key Findings</a:t>
+            </a:r>
+          </a:p>
+        </p:txBody>
+      </p:sp>
+      <p:sp>
+        <p:nvSpPr>
+          <p:cNvPr id="3" name="TextBox 2"/>
+          <p:cNvSpPr txBox="1"/>
+          <p:nvPr/>
+        </p:nvSpPr>
+        <p:spPr>
+          <a:xfrm>
+            <a:off x="1097280" y="2011680"/>
+            <a:ext cx="16093440" cy="6583680"/>
+          </a:xfrm>
+          <a:prstGeom prst="rect">
+            <a:avLst/>
+          </a:prstGeom>
+          <a:noFill/>
+        </p:spPr>
+        <p:txBody>
+          <a:bodyPr wrap="square" anchor="t" lIns="50800" rIns="50800" tIns="25400" bIns="25400">
+            <a:spAutoFit/>
+          </a:bodyPr>
+          <a:lstStyle/>
+          <a:p>
+            <a:pPr algn="l">
+              <a:spcAft>
+                <a:spcPts val="1600"/>
+              </a:spcAft>
+              <a:buNone/>
+            </a:pPr>
+            <a:r>
+              <a:rPr sz="2800" b="1" i="0">
+                <a:solidFill>
+                  <a:srgbClr val="2E7D32"/>
+                </a:solidFill>
+                <a:latin typeface="Open Sans"/>
+              </a:rPr>
+              <a:t>✓   Satellite pretraining works</a:t>
+            </a:r>
+          </a:p>
+          <a:p>
+            <a:pPr algn="l">
+              <a:spcAft>
+                <a:spcPts val="1600"/>
+              </a:spcAft>
+              <a:buNone/>
+            </a:pPr>
+            <a:r>
+              <a:rPr sz="2800" b="1" i="0">
+                <a:solidFill>
+                  <a:srgbClr val="2E7D32"/>
+                </a:solidFill>
+                <a:latin typeface="Open Sans"/>
+              </a:rPr>
+              <a:t>✓   SatMAE++ &gt; RSP &gt; Scratch</a:t>
+            </a:r>
+          </a:p>
+          <a:p>
+            <a:pPr algn="l">
+              <a:spcAft>
+                <a:spcPts val="1600"/>
+              </a:spcAft>
+              <a:buNone/>
+            </a:pPr>
+            <a:r>
+              <a:rPr sz="2800" b="1" i="0">
+                <a:solidFill>
+                  <a:srgbClr val="2E7D32"/>
+                </a:solidFill>
+                <a:latin typeface="Open Sans"/>
+              </a:rPr>
+              <a:t>✓   Frozen features are surprisingly strong</a:t>
+            </a:r>
+          </a:p>
+          <a:p>
+            <a:pPr algn="l">
+              <a:spcAft>
+                <a:spcPts val="1600"/>
+              </a:spcAft>
+              <a:buNone/>
+            </a:pPr>
+            <a:r>
+              <a:rPr sz="2800" b="1" i="0">
+                <a:solidFill>
+                  <a:srgbClr val="2E7D32"/>
+                </a:solidFill>
+                <a:latin typeface="Open Sans"/>
+              </a:rPr>
+              <a:t>✓   Wavelets bring little benefit</a:t>
+            </a:r>
+          </a:p>
+          <a:p>
+            <a:pPr algn="l">
+              <a:spcAft>
+                <a:spcPts val="1600"/>
+              </a:spcAft>
+              <a:buNone/>
+            </a:pPr>
+            <a:r>
+              <a:rPr sz="2800" b="1" i="0">
+                <a:solidFill>
+                  <a:srgbClr val="2E7D32"/>
+                </a:solidFill>
+                <a:latin typeface="Open Sans"/>
+              </a:rPr>
+              <a:t>✓   Multispectral pretraining scales to Sentinel data</a:t>
+            </a:r>
+          </a:p>
+        </p:txBody>
+      </p:sp>
+    </p:spTree>
+  </p:cSld>
+  <p:clrMapOvr>
+    <a:masterClrMapping/>
+  </p:clrMapOvr>
+</p:sld>
+</file>
+
+<file path=ppt/slides/slide19.xml><?xml version="1.0" encoding="utf-8"?>
+<p:sld xmlns:a="http://schemas.openxmlformats.org/drawingml/2006/main" xmlns:p="http://schemas.openxmlformats.org/presentationml/2006/main" xmlns:r="http://schemas.openxmlformats.org/officeDocument/2006/relationships">
+  <p:cSld>
+    <p:spTree>
+      <p:nvGrpSpPr>
+        <p:cNvPr id="1" name=""/>
+        <p:cNvGrpSpPr/>
+        <p:nvPr/>
+      </p:nvGrpSpPr>
+      <p:grpSpPr/>
+      <p:sp>
+        <p:nvSpPr>
+          <p:cNvPr id="2" name="TextBox 1"/>
+          <p:cNvSpPr txBox="1"/>
+          <p:nvPr/>
+        </p:nvSpPr>
+        <p:spPr>
+          <a:xfrm>
+            <a:off x="822960" y="457200"/>
+            <a:ext cx="16642080" cy="1280160"/>
+          </a:xfrm>
+          <a:prstGeom prst="rect">
+            <a:avLst/>
+          </a:prstGeom>
+          <a:noFill/>
+        </p:spPr>
+        <p:txBody>
+          <a:bodyPr wrap="square" anchor="t" lIns="50800" rIns="50800" tIns="25400" bIns="25400">
+            <a:spAutoFit/>
+          </a:bodyPr>
+          <a:lstStyle/>
+          <a:p>
+            <a:pPr algn="l">
+              <a:spcAft>
+                <a:spcPts val="0"/>
+              </a:spcAft>
+              <a:buNone/>
+            </a:pPr>
+            <a:r>
+              <a:rPr sz="4000" b="1" i="0">
+                <a:solidFill>
+                  <a:srgbClr val="6F0A19"/>
+                </a:solidFill>
+                <a:latin typeface="Open Sans"/>
+              </a:rPr>
+              <a:t>Future Work</a:t>
+            </a:r>
+          </a:p>
+        </p:txBody>
+      </p:sp>
+      <p:sp>
+        <p:nvSpPr>
+          <p:cNvPr id="3" name="TextBox 2"/>
+          <p:cNvSpPr txBox="1"/>
+          <p:nvPr/>
+        </p:nvSpPr>
+        <p:spPr>
+          <a:xfrm>
+            <a:off x="1097280" y="2377440"/>
+            <a:ext cx="7315200" cy="1280160"/>
+          </a:xfrm>
+          <a:prstGeom prst="rect">
+            <a:avLst/>
+          </a:prstGeom>
+          <a:noFill/>
+        </p:spPr>
+        <p:txBody>
+          <a:bodyPr wrap="square" anchor="ctr" lIns="50800" rIns="50800" tIns="25400" bIns="25400">
+            <a:spAutoFit/>
+          </a:bodyPr>
+          <a:lstStyle/>
+          <a:p>
+            <a:pPr algn="ctr">
+              <a:spcAft>
+                <a:spcPts val="0"/>
+              </a:spcAft>
+              <a:buNone/>
+            </a:pPr>
+            <a:r>
+              <a:rPr sz="3000" b="1" i="0">
+                <a:solidFill>
+                  <a:srgbClr val="6F0A19"/>
+                </a:solidFill>
+                <a:latin typeface="Open Sans"/>
+              </a:rPr>
+              <a:t>SAMRS</a:t>
+            </a:r>
+          </a:p>
+        </p:txBody>
+      </p:sp>
+      <p:sp>
+        <p:nvSpPr>
+          <p:cNvPr id="4" name="TextBox 3"/>
+          <p:cNvSpPr txBox="1"/>
+          <p:nvPr/>
+        </p:nvSpPr>
+        <p:spPr>
+          <a:xfrm>
+            <a:off x="9144000" y="2377440"/>
+            <a:ext cx="7315200" cy="1280160"/>
+          </a:xfrm>
+          <a:prstGeom prst="rect">
+            <a:avLst/>
+          </a:prstGeom>
+          <a:noFill/>
+        </p:spPr>
+        <p:txBody>
+          <a:bodyPr wrap="square" anchor="ctr" lIns="50800" rIns="50800" tIns="25400" bIns="25400">
+            <a:spAutoFit/>
+          </a:bodyPr>
+          <a:lstStyle/>
+          <a:p>
+            <a:pPr algn="ctr">
+              <a:spcAft>
+                <a:spcPts val="0"/>
+              </a:spcAft>
+              <a:buNone/>
+            </a:pPr>
+            <a:r>
+              <a:rPr sz="3000" b="1" i="0">
+                <a:solidFill>
+                  <a:srgbClr val="6F0A19"/>
+                </a:solidFill>
+                <a:latin typeface="Open Sans"/>
+              </a:rPr>
+              <a:t>More SAR Fusion</a:t>
+            </a:r>
+          </a:p>
+        </p:txBody>
+      </p:sp>
+      <p:sp>
+        <p:nvSpPr>
+          <p:cNvPr id="5" name="TextBox 4"/>
+          <p:cNvSpPr txBox="1"/>
+          <p:nvPr/>
+        </p:nvSpPr>
+        <p:spPr>
+          <a:xfrm>
+            <a:off x="1097280" y="5303520"/>
+            <a:ext cx="7315200" cy="1280160"/>
+          </a:xfrm>
+          <a:prstGeom prst="rect">
+            <a:avLst/>
+          </a:prstGeom>
+          <a:noFill/>
+        </p:spPr>
+        <p:txBody>
+          <a:bodyPr wrap="square" anchor="ctr" lIns="50800" rIns="50800" tIns="25400" bIns="25400">
+            <a:spAutoFit/>
+          </a:bodyPr>
+          <a:lstStyle/>
+          <a:p>
+            <a:pPr algn="ctr">
+              <a:spcAft>
+                <a:spcPts val="0"/>
+              </a:spcAft>
+              <a:buNone/>
+            </a:pPr>
+            <a:r>
+              <a:rPr sz="3000" b="1" i="0">
+                <a:solidFill>
+                  <a:srgbClr val="6F0A19"/>
+                </a:solidFill>
+                <a:latin typeface="Open Sans"/>
+              </a:rPr>
+              <a:t>Semi-Supervised Learning</a:t>
+            </a:r>
+          </a:p>
+        </p:txBody>
+      </p:sp>
+      <p:sp>
+        <p:nvSpPr>
+          <p:cNvPr id="6" name="TextBox 5"/>
+          <p:cNvSpPr txBox="1"/>
+          <p:nvPr/>
+        </p:nvSpPr>
+        <p:spPr>
+          <a:xfrm>
+            <a:off x="9144000" y="5303520"/>
+            <a:ext cx="7315200" cy="1280160"/>
+          </a:xfrm>
+          <a:prstGeom prst="rect">
+            <a:avLst/>
+          </a:prstGeom>
+          <a:noFill/>
+        </p:spPr>
+        <p:txBody>
+          <a:bodyPr wrap="square" anchor="ctr" lIns="50800" rIns="50800" tIns="25400" bIns="25400">
+            <a:spAutoFit/>
+          </a:bodyPr>
+          <a:lstStyle/>
+          <a:p>
+            <a:pPr algn="ctr">
+              <a:spcAft>
+                <a:spcPts val="0"/>
+              </a:spcAft>
+              <a:buNone/>
+            </a:pPr>
+            <a:r>
+              <a:rPr sz="3000" b="1" i="0">
+                <a:solidFill>
+                  <a:srgbClr val="6F0A19"/>
+                </a:solidFill>
+                <a:latin typeface="Open Sans"/>
+              </a:rPr>
+              <a:t>Larger Datasets</a:t>
             </a:r>
           </a:p>
         </p:txBody>
@@ -3355,8 +5470,8 @@
         </p:nvSpPr>
         <p:spPr>
           <a:xfrm>
-            <a:off x="822960" y="502920"/>
-            <a:ext cx="16642080" cy="1188720"/>
+            <a:off x="822960" y="457200"/>
+            <a:ext cx="16642080" cy="1280160"/>
           </a:xfrm>
           <a:prstGeom prst="rect">
             <a:avLst/>
@@ -3364,7 +5479,7 @@
           <a:noFill/>
         </p:spPr>
         <p:txBody>
-          <a:bodyPr wrap="square" anchor="t" lIns="25400" rIns="25400" tIns="25400" bIns="25400">
+          <a:bodyPr wrap="square" anchor="t" lIns="50800" rIns="50800" tIns="25400" bIns="25400">
             <a:spAutoFit/>
           </a:bodyPr>
           <a:lstStyle/>
@@ -3376,13 +5491,13 @@
               <a:buNone/>
             </a:pPr>
             <a:r>
-              <a:rPr sz="3400" b="1" i="0">
+              <a:rPr sz="4000" b="1" i="0">
                 <a:solidFill>
                   <a:srgbClr val="6F0A19"/>
                 </a:solidFill>
                 <a:latin typeface="Open Sans"/>
               </a:rPr>
-              <a:t>Objective and hypothesis</a:t>
+              <a:t>The Challenge</a:t>
             </a:r>
           </a:p>
         </p:txBody>
@@ -3395,8 +5510,8 @@
         </p:nvSpPr>
         <p:spPr>
           <a:xfrm>
-            <a:off x="914400" y="1920240"/>
-            <a:ext cx="10241280" cy="7772400"/>
+            <a:off x="822960" y="2011680"/>
+            <a:ext cx="5669280" cy="5943600"/>
           </a:xfrm>
           <a:prstGeom prst="rect">
             <a:avLst/>
@@ -3404,89 +5519,59 @@
           <a:noFill/>
         </p:spPr>
         <p:txBody>
-          <a:bodyPr wrap="square" anchor="t" lIns="25400" rIns="25400" tIns="25400" bIns="25400">
+          <a:bodyPr wrap="square" anchor="t" lIns="50800" rIns="50800" tIns="25400" bIns="25400">
             <a:spAutoFit/>
           </a:bodyPr>
           <a:lstStyle/>
           <a:p>
             <a:pPr algn="l">
               <a:spcAft>
-                <a:spcPts val="1400"/>
-              </a:spcAft>
-              <a:buFont typeface="Arial"/>
-              <a:buChar char="-"/>
-            </a:pPr>
-            <a:r>
-              <a:rPr sz="1900" b="1" i="0">
-                <a:solidFill>
-                  <a:srgbClr val="222222"/>
-                </a:solidFill>
-                <a:latin typeface="Open Sans"/>
-              </a:rPr>
-              <a:t>Task: </a:t>
-            </a:r>
-            <a:r>
-              <a:rPr sz="1900" b="0" i="0">
-                <a:solidFill>
-                  <a:srgbClr val="222222"/>
-                </a:solidFill>
-                <a:latin typeface="Open Sans"/>
-              </a:rPr>
-              <a:t>high-resolution semantic land-cover segmentation with FEW labels (data-scarce).</a:t>
+                <a:spcPts val="1800"/>
+              </a:spcAft>
+              <a:buNone/>
+            </a:pPr>
+            <a:r>
+              <a:rPr sz="3000" b="1" i="0">
+                <a:solidFill>
+                  <a:srgbClr val="6F0A19"/>
+                </a:solidFill>
+                <a:latin typeface="Open Sans"/>
+              </a:rPr>
+              <a:t>Few Labels</a:t>
             </a:r>
           </a:p>
           <a:p>
             <a:pPr algn="l">
               <a:spcAft>
-                <a:spcPts val="1400"/>
-              </a:spcAft>
-              <a:buFont typeface="Arial"/>
-              <a:buChar char="-"/>
-            </a:pPr>
-            <a:r>
-              <a:rPr sz="1900" b="1" i="0">
-                <a:solidFill>
-                  <a:srgbClr val="222222"/>
-                </a:solidFill>
-                <a:latin typeface="Open Sans"/>
-              </a:rPr>
-              <a:t>Remote-sensing challenges: </a:t>
-            </a:r>
-            <a:r>
-              <a:rPr sz="1900" b="0" i="0">
-                <a:solidFill>
-                  <a:srgbClr val="222222"/>
-                </a:solidFill>
-                <a:latin typeface="Open Sans"/>
-              </a:rPr>
-              <a:t>1024x1024 images (fine GSD), strong class imbalance, scarce annotated labels.</a:t>
+                <a:spcPts val="1800"/>
+              </a:spcAft>
+              <a:buNone/>
+            </a:pPr>
+            <a:r>
+              <a:rPr sz="3000" b="1" i="0">
+                <a:solidFill>
+                  <a:srgbClr val="6F0A19"/>
+                </a:solidFill>
+                <a:latin typeface="Open Sans"/>
+              </a:rPr>
+              <a:t>Large Images</a:t>
             </a:r>
           </a:p>
           <a:p>
             <a:pPr algn="l">
               <a:spcAft>
-                <a:spcPts val="1400"/>
-              </a:spcAft>
-              <a:buFont typeface="Arial"/>
-              <a:buChar char="-"/>
-            </a:pPr>
-            <a:r>
-              <a:rPr sz="1900" b="1" i="0">
-                <a:solidFill>
-                  <a:srgbClr val="222222"/>
-                </a:solidFill>
-                <a:latin typeface="Open Sans"/>
-              </a:rPr>
-              <a:t>Dataset: </a:t>
-            </a:r>
-            <a:r>
-              <a:rPr sz="1900" b="0" i="0">
-                <a:solidFill>
-                  <a:srgbClr val="222222"/>
-                </a:solidFill>
-                <a:latin typeface="Open Sans"/>
-              </a:rPr>
-              <a:t>LoveDA - 7 classes (building, road, water, barren, forest, agriculture, background), urban + rural scenes.</a:t>
+                <a:spcPts val="2400"/>
+              </a:spcAft>
+              <a:buNone/>
+            </a:pPr>
+            <a:r>
+              <a:rPr sz="3000" b="1" i="0">
+                <a:solidFill>
+                  <a:srgbClr val="6F0A19"/>
+                </a:solidFill>
+                <a:latin typeface="Open Sans"/>
+              </a:rPr>
+              <a:t>Complex Land-Cover Classes</a:t>
             </a:r>
           </a:p>
           <a:p>
@@ -3494,49 +5579,41 @@
               <a:spcAft>
                 <a:spcPts val="0"/>
               </a:spcAft>
-              <a:buFont typeface="Arial"/>
-              <a:buChar char="-"/>
-            </a:pPr>
-            <a:r>
-              <a:rPr sz="1900" b="1" i="0">
-                <a:solidFill>
-                  <a:srgbClr val="6F0A19"/>
-                </a:solidFill>
-                <a:latin typeface="Open Sans"/>
-              </a:rPr>
-              <a:t>Central hypothesis: </a:t>
-            </a:r>
-            <a:r>
-              <a:rPr sz="1900" b="0" i="0">
-                <a:solidFill>
-                  <a:srgbClr val="6F0A19"/>
-                </a:solidFill>
-                <a:latin typeface="Open Sans"/>
-              </a:rPr>
-              <a:t>satellite pretraining improves segmentation when labels are few. By how much vs a standard initialization?</a:t>
-            </a:r>
-          </a:p>
-        </p:txBody>
-      </p:sp>
-      <p:sp>
-        <p:nvSpPr>
-          <p:cNvPr id="4" name="Rectangle 3"/>
+              <a:buNone/>
+            </a:pPr>
+            <a:r>
+              <a:rPr sz="1700" b="0" i="1">
+                <a:solidFill>
+                  <a:srgbClr val="7A7A7A"/>
+                </a:solidFill>
+                <a:latin typeface="Open Sans"/>
+              </a:rPr>
+              <a:t>Annotating satellite imagery is expensive - can pretraining compensate for label scarcity?</a:t>
+            </a:r>
+          </a:p>
+        </p:txBody>
+      </p:sp>
+      <p:sp>
+        <p:nvSpPr>
+          <p:cNvPr id="4" name="Rounded Rectangle 3"/>
           <p:cNvSpPr/>
           <p:nvPr/>
         </p:nvSpPr>
         <p:spPr>
           <a:xfrm>
-            <a:off x="11612880" y="2103120"/>
-            <a:ext cx="5760720" cy="3840480"/>
-          </a:xfrm>
-          <a:prstGeom prst="rect">
+            <a:off x="6766560" y="1920240"/>
+            <a:ext cx="10607040" cy="6675120"/>
+          </a:xfrm>
+          <a:prstGeom prst="roundRect">
             <a:avLst/>
           </a:prstGeom>
           <a:solidFill>
-            <a:srgbClr val="F4ECEC"/>
+            <a:srgbClr val="ECECEC"/>
           </a:solidFill>
-          <a:ln>
-            <a:noFill/>
+          <a:ln w="15875">
+            <a:solidFill>
+              <a:srgbClr val="BCBCBC"/>
+            </a:solidFill>
           </a:ln>
           <a:effectLst/>
         </p:spPr>
@@ -3555,6 +5632,77 @@
           </a:fontRef>
         </p:style>
         <p:txBody>
+          <a:bodyPr rtlCol="0" anchor="ctr" wrap="square"/>
+          <a:lstStyle/>
+          <a:p>
+            <a:pPr algn="ctr"/>
+            <a:r>
+              <a:rPr sz="1500" i="1">
+                <a:solidFill>
+                  <a:srgbClr val="7A7A7A"/>
+                </a:solidFill>
+                <a:latin typeface="Open Sans"/>
+              </a:rPr>
+              <a:t>[ IMAGE: LoveDA RGB  +  Ground-Truth mask ]</a:t>
+            </a:r>
+          </a:p>
+        </p:txBody>
+      </p:sp>
+    </p:spTree>
+  </p:cSld>
+  <p:clrMapOvr>
+    <a:masterClrMapping/>
+  </p:clrMapOvr>
+</p:sld>
+</file>
+
+<file path=ppt/slides/slide20.xml><?xml version="1.0" encoding="utf-8"?>
+<p:sld xmlns:a="http://schemas.openxmlformats.org/drawingml/2006/main" xmlns:p="http://schemas.openxmlformats.org/presentationml/2006/main" xmlns:r="http://schemas.openxmlformats.org/officeDocument/2006/relationships">
+  <p:cSld>
+    <p:spTree>
+      <p:nvGrpSpPr>
+        <p:cNvPr id="1" name=""/>
+        <p:cNvGrpSpPr/>
+        <p:nvPr/>
+      </p:nvGrpSpPr>
+      <p:grpSpPr/>
+      <p:sp>
+        <p:nvSpPr>
+          <p:cNvPr id="2" name="Rectangle 1"/>
+          <p:cNvSpPr/>
+          <p:nvPr/>
+        </p:nvSpPr>
+        <p:spPr>
+          <a:xfrm>
+            <a:off x="0" y="0"/>
+            <a:ext cx="18288000" cy="10287000"/>
+          </a:xfrm>
+          <a:prstGeom prst="rect">
+            <a:avLst/>
+          </a:prstGeom>
+          <a:solidFill>
+            <a:srgbClr val="6F0A19"/>
+          </a:solidFill>
+          <a:ln>
+            <a:noFill/>
+          </a:ln>
+          <a:effectLst/>
+        </p:spPr>
+        <p:style>
+          <a:lnRef idx="1">
+            <a:schemeClr val="accent1"/>
+          </a:lnRef>
+          <a:fillRef idx="3">
+            <a:schemeClr val="accent1"/>
+          </a:fillRef>
+          <a:effectRef idx="2">
+            <a:schemeClr val="accent1"/>
+          </a:effectRef>
+          <a:fontRef idx="minor">
+            <a:schemeClr val="lt1"/>
+          </a:fontRef>
+        </p:style>
+        <p:txBody>
           <a:bodyPr rtlCol="0" anchor="ctr"/>
           <a:lstStyle/>
           <a:p>
@@ -3564,14 +5712,14 @@
       </p:sp>
       <p:sp>
         <p:nvSpPr>
-          <p:cNvPr id="5" name="TextBox 4"/>
+          <p:cNvPr id="3" name="TextBox 2"/>
           <p:cNvSpPr txBox="1"/>
           <p:nvPr/>
         </p:nvSpPr>
         <p:spPr>
           <a:xfrm>
-            <a:off x="11887200" y="2377440"/>
-            <a:ext cx="5212080" cy="3291840"/>
+            <a:off x="1097280" y="2926080"/>
+            <a:ext cx="16093440" cy="4206240"/>
           </a:xfrm>
           <a:prstGeom prst="rect">
             <a:avLst/>
@@ -3579,42 +5727,76 @@
           <a:noFill/>
         </p:spPr>
         <p:txBody>
-          <a:bodyPr wrap="square" anchor="ctr" lIns="25400" rIns="25400" tIns="25400" bIns="25400">
+          <a:bodyPr wrap="square" anchor="ctr" lIns="50800" rIns="50800" tIns="25400" bIns="25400">
             <a:spAutoFit/>
           </a:bodyPr>
           <a:lstStyle/>
           <a:p>
-            <a:pPr algn="l">
-              <a:spcAft>
-                <a:spcPts val="1000"/>
-              </a:spcAft>
-              <a:buNone/>
-            </a:pPr>
-            <a:r>
-              <a:rPr sz="1800" b="1" i="0">
-                <a:solidFill>
-                  <a:srgbClr val="6F0A19"/>
-                </a:solidFill>
-                <a:latin typeface="Open Sans"/>
-              </a:rPr>
-              <a:t>The project question</a:t>
-            </a:r>
-          </a:p>
-          <a:p>
-            <a:pPr algn="l">
-              <a:spcAft>
-                <a:spcPts val="0"/>
-              </a:spcAft>
-              <a:buNone/>
-            </a:pPr>
-            <a:r>
-              <a:rPr sz="2000" b="0" i="1">
-                <a:solidFill>
-                  <a:srgbClr val="222222"/>
-                </a:solidFill>
-                <a:latin typeface="Open Sans"/>
-              </a:rPr>
-              <a:t>"How much is satellite pretraining worth when you have 100-300 labeled images instead of thousands?"</a:t>
+            <a:pPr algn="ctr">
+              <a:spcAft>
+                <a:spcPts val="400"/>
+              </a:spcAft>
+              <a:buNone/>
+            </a:pPr>
+            <a:r>
+              <a:rPr sz="5200" b="1" i="0">
+                <a:solidFill>
+                  <a:srgbClr val="FFFFFF"/>
+                </a:solidFill>
+                <a:latin typeface="Open Sans"/>
+              </a:rPr>
+              <a:t>Pretraining matters</a:t>
+            </a:r>
+          </a:p>
+          <a:p>
+            <a:pPr algn="ctr">
+              <a:spcAft>
+                <a:spcPts val="1600"/>
+              </a:spcAft>
+              <a:buNone/>
+            </a:pPr>
+            <a:r>
+              <a:rPr sz="5200" b="1" i="0">
+                <a:solidFill>
+                  <a:srgbClr val="FFFFFF"/>
+                </a:solidFill>
+                <a:latin typeface="Open Sans"/>
+              </a:rPr>
+              <a:t>more than architecture.</a:t>
+            </a:r>
+          </a:p>
+          <a:p>
+            <a:pPr algn="ctr">
+              <a:spcAft>
+                <a:spcPts val="400"/>
+              </a:spcAft>
+              <a:buNone/>
+            </a:pPr>
+            <a:r>
+              <a:rPr sz="2600" b="0" i="0">
+                <a:solidFill>
+                  <a:srgbClr val="ECD2D2"/>
+                </a:solidFill>
+                <a:latin typeface="Open Sans"/>
+              </a:rPr>
+              <a:t>Satellite-specific representations dramatically improve</a:t>
+            </a:r>
+          </a:p>
+          <a:p>
+            <a:pPr algn="ctr">
+              <a:spcAft>
+                <a:spcPts val="400"/>
+              </a:spcAft>
+              <a:buNone/>
+            </a:pPr>
+            <a:r>
+              <a:rPr sz="2600" b="0" i="0">
+                <a:solidFill>
+                  <a:srgbClr val="ECD2D2"/>
+                </a:solidFill>
+                <a:latin typeface="Open Sans"/>
+              </a:rPr>
+              <a:t>segmentation in data-scarce scenarios.</a:t>
             </a:r>
           </a:p>
         </p:txBody>
@@ -3639,180 +5821,20 @@
       <p:grpSpPr/>
       <p:sp>
         <p:nvSpPr>
-          <p:cNvPr id="2" name="TextBox 1"/>
-          <p:cNvSpPr txBox="1"/>
-          <p:nvPr/>
-        </p:nvSpPr>
-        <p:spPr>
-          <a:xfrm>
-            <a:off x="822960" y="502920"/>
-            <a:ext cx="16642080" cy="1188720"/>
-          </a:xfrm>
-          <a:prstGeom prst="rect">
-            <a:avLst/>
-          </a:prstGeom>
-          <a:noFill/>
-        </p:spPr>
-        <p:txBody>
-          <a:bodyPr wrap="square" anchor="t" lIns="25400" rIns="25400" tIns="25400" bIns="25400">
-            <a:spAutoFit/>
-          </a:bodyPr>
-          <a:lstStyle/>
-          <a:p>
-            <a:pPr algn="l">
-              <a:spcAft>
-                <a:spcPts val="0"/>
-              </a:spcAft>
-              <a:buNone/>
-            </a:pPr>
-            <a:r>
-              <a:rPr sz="3400" b="1" i="0">
-                <a:solidFill>
-                  <a:srgbClr val="6F0A19"/>
-                </a:solidFill>
-                <a:latin typeface="Open Sans"/>
-              </a:rPr>
-              <a:t>Two transformers, two weight sets: why they don't mix</a:t>
-            </a:r>
-          </a:p>
-        </p:txBody>
-      </p:sp>
-      <p:sp>
-        <p:nvSpPr>
-          <p:cNvPr id="3" name="TextBox 2"/>
-          <p:cNvSpPr txBox="1"/>
-          <p:nvPr/>
-        </p:nvSpPr>
-        <p:spPr>
-          <a:xfrm>
-            <a:off x="914400" y="1828800"/>
-            <a:ext cx="7863840" cy="7772400"/>
-          </a:xfrm>
-          <a:prstGeom prst="rect">
-            <a:avLst/>
-          </a:prstGeom>
-          <a:noFill/>
-        </p:spPr>
-        <p:txBody>
-          <a:bodyPr wrap="square" anchor="t" lIns="25400" rIns="25400" tIns="25400" bIns="25400">
-            <a:spAutoFit/>
-          </a:bodyPr>
-          <a:lstStyle/>
-          <a:p>
-            <a:pPr algn="l">
-              <a:spcAft>
-                <a:spcPts val="400"/>
-              </a:spcAft>
-              <a:buNone/>
-            </a:pPr>
-            <a:r>
-              <a:rPr sz="2000" b="1" i="0">
-                <a:solidFill>
-                  <a:srgbClr val="1F497D"/>
-                </a:solidFill>
-                <a:latin typeface="Open Sans"/>
-              </a:rPr>
-              <a:t>SatMAE++ = ViT-L</a:t>
-            </a:r>
-          </a:p>
-          <a:p>
-            <a:pPr algn="l">
-              <a:spcAft>
-                <a:spcPts val="1400"/>
-              </a:spcAft>
-              <a:buFont typeface="Arial"/>
-              <a:buChar char="-"/>
-            </a:pPr>
-            <a:r>
-              <a:rPr sz="1700" b="0" i="0">
-                <a:solidFill>
-                  <a:srgbClr val="222222"/>
-                </a:solidFill>
-                <a:latin typeface="Open Sans"/>
-              </a:rPr>
-              <a:t>patch 16 - GLOBAL attention - isotropic (14x14, 1024-dim across all 24 layers)</a:t>
-            </a:r>
-          </a:p>
-          <a:p>
-            <a:pPr algn="l">
-              <a:spcAft>
-                <a:spcPts val="400"/>
-              </a:spcAft>
-              <a:buNone/>
-            </a:pPr>
-            <a:r>
-              <a:rPr sz="2000" b="1" i="0">
-                <a:solidFill>
-                  <a:srgbClr val="1F497D"/>
-                </a:solidFill>
-                <a:latin typeface="Open Sans"/>
-              </a:rPr>
-              <a:t>RSP = Swin-T</a:t>
-            </a:r>
-          </a:p>
-          <a:p>
-            <a:pPr algn="l">
-              <a:spcAft>
-                <a:spcPts val="1400"/>
-              </a:spcAft>
-              <a:buFont typeface="Arial"/>
-              <a:buChar char="-"/>
-            </a:pPr>
-            <a:r>
-              <a:rPr sz="1700" b="0" i="0">
-                <a:solidFill>
-                  <a:srgbClr val="222222"/>
-                </a:solidFill>
-                <a:latin typeface="Open Sans"/>
-              </a:rPr>
-              <a:t>patch 4 - WINDOWED attention - hierarchical (56-&gt;7, channels 96-&gt;768)</a:t>
-            </a:r>
-          </a:p>
-          <a:p>
-            <a:pPr algn="l">
-              <a:spcAft>
-                <a:spcPts val="0"/>
-              </a:spcAft>
-              <a:buFont typeface="Arial"/>
-              <a:buChar char="-"/>
-            </a:pPr>
-            <a:r>
-              <a:rPr sz="1700" b="1" i="0">
-                <a:solidFill>
-                  <a:srgbClr val="6F0A19"/>
-                </a:solidFill>
-                <a:latin typeface="Open Sans"/>
-              </a:rPr>
-              <a:t>Consequence: </a:t>
-            </a:r>
-            <a:r>
-              <a:rPr sz="1700" b="0" i="0">
-                <a:solidFill>
-                  <a:srgbClr val="6F0A19"/>
-                </a:solidFill>
-                <a:latin typeface="Open Sans"/>
-              </a:rPr>
-              <a:t>ViT weights do NOT fit into a Swin - different shapes and operations at every level (patch embed, attention, downsampling).</a:t>
-            </a:r>
-          </a:p>
-        </p:txBody>
-      </p:sp>
-      <p:sp>
-        <p:nvSpPr>
-          <p:cNvPr id="4" name="Rectangle 3"/>
+          <p:cNvPr id="2" name="Rectangle 1"/>
           <p:cNvSpPr/>
           <p:nvPr/>
         </p:nvSpPr>
         <p:spPr>
           <a:xfrm>
-            <a:off x="9144000" y="1828800"/>
-            <a:ext cx="8229600" cy="6949440"/>
+            <a:off x="0" y="0"/>
+            <a:ext cx="18288000" cy="10287000"/>
           </a:xfrm>
           <a:prstGeom prst="rect">
             <a:avLst/>
           </a:prstGeom>
           <a:solidFill>
-            <a:srgbClr val="F4ECEC"/>
+            <a:srgbClr val="6F0A19"/>
           </a:solidFill>
           <a:ln>
             <a:noFill/>
@@ -3843,14 +5865,14 @@
       </p:sp>
       <p:sp>
         <p:nvSpPr>
-          <p:cNvPr id="5" name="TextBox 4"/>
+          <p:cNvPr id="3" name="TextBox 2"/>
           <p:cNvSpPr txBox="1"/>
           <p:nvPr/>
         </p:nvSpPr>
         <p:spPr>
           <a:xfrm>
-            <a:off x="9509760" y="2194560"/>
-            <a:ext cx="7498079" cy="6400800"/>
+            <a:off x="1097280" y="3474720"/>
+            <a:ext cx="16093440" cy="4206240"/>
           </a:xfrm>
           <a:prstGeom prst="rect">
             <a:avLst/>
@@ -3858,112 +5880,82 @@
           <a:noFill/>
         </p:spPr>
         <p:txBody>
-          <a:bodyPr wrap="square" anchor="t" lIns="25400" rIns="25400" tIns="25400" bIns="25400">
+          <a:bodyPr wrap="square" anchor="ctr" lIns="50800" rIns="50800" tIns="25400" bIns="25400">
             <a:spAutoFit/>
           </a:bodyPr>
           <a:lstStyle/>
           <a:p>
-            <a:pPr algn="l">
-              <a:spcAft>
-                <a:spcPts val="1200"/>
-              </a:spcAft>
-              <a:buNone/>
-            </a:pPr>
-            <a:r>
-              <a:rPr sz="1900" b="1" i="0">
-                <a:solidFill>
-                  <a:srgbClr val="6F0A19"/>
-                </a:solidFill>
-                <a:latin typeface="Open Sans"/>
-              </a:rPr>
-              <a:t>The solution: two separate paths</a:t>
-            </a:r>
-          </a:p>
-          <a:p>
-            <a:pPr algn="l">
-              <a:spcAft>
-                <a:spcPts val="200"/>
-              </a:spcAft>
-              <a:buNone/>
-            </a:pPr>
-            <a:r>
-              <a:rPr sz="1800" b="1" i="0">
-                <a:solidFill>
-                  <a:srgbClr val="1F497D"/>
-                </a:solidFill>
-                <a:latin typeface="Open Sans"/>
-              </a:rPr>
-              <a:t>(A) Swin-T U-Net + RSP weights</a:t>
-            </a:r>
-          </a:p>
-          <a:p>
-            <a:pPr algn="l">
-              <a:spcAft>
-                <a:spcPts val="1400"/>
-              </a:spcAft>
-              <a:buFont typeface="Arial"/>
-              <a:buChar char="-"/>
-            </a:pPr>
-            <a:r>
-              <a:rPr sz="1600" b="0" i="0">
-                <a:solidFill>
-                  <a:srgbClr val="222222"/>
-                </a:solidFill>
-                <a:latin typeface="Open Sans"/>
-              </a:rPr>
-              <a:t>native satellite pretraining for Swin, full fine-tuning.</a:t>
-            </a:r>
-          </a:p>
-          <a:p>
-            <a:pPr algn="l">
-              <a:spcAft>
-                <a:spcPts val="200"/>
-              </a:spcAft>
-              <a:buNone/>
-            </a:pPr>
-            <a:r>
-              <a:rPr sz="1800" b="1" i="0">
-                <a:solidFill>
-                  <a:srgbClr val="1F497D"/>
-                </a:solidFill>
-                <a:latin typeface="Open Sans"/>
-              </a:rPr>
-              <a:t>(B) SatMAE++ ViT-L U-Net (UNETR-like)</a:t>
-            </a:r>
-          </a:p>
-          <a:p>
-            <a:pPr algn="l">
-              <a:spcAft>
-                <a:spcPts val="1400"/>
-              </a:spcAft>
-              <a:buFont typeface="Arial"/>
-              <a:buChar char="-"/>
-            </a:pPr>
-            <a:r>
-              <a:rPr sz="1600" b="0" i="0">
-                <a:solidFill>
-                  <a:srgbClr val="222222"/>
-                </a:solidFill>
-                <a:latin typeface="Open Sans"/>
-              </a:rPr>
-              <a:t>frozen encoder + lightweight decoder -&gt; feasible on Colab T4.</a:t>
-            </a:r>
-          </a:p>
-          <a:p>
-            <a:pPr algn="l">
+            <a:pPr algn="ctr">
+              <a:spcAft>
+                <a:spcPts val="400"/>
+              </a:spcAft>
+              <a:buNone/>
+            </a:pPr>
+            <a:r>
+              <a:rPr sz="5200" b="1" i="0">
+                <a:solidFill>
+                  <a:srgbClr val="FFFFFF"/>
+                </a:solidFill>
+                <a:latin typeface="Open Sans"/>
+              </a:rPr>
+              <a:t>Does satellite-specific</a:t>
+            </a:r>
+          </a:p>
+          <a:p>
+            <a:pPr algn="ctr">
+              <a:spcAft>
+                <a:spcPts val="1600"/>
+              </a:spcAft>
+              <a:buNone/>
+            </a:pPr>
+            <a:r>
+              <a:rPr sz="5200" b="1" i="0">
+                <a:solidFill>
+                  <a:srgbClr val="FFFFFF"/>
+                </a:solidFill>
+                <a:latin typeface="Open Sans"/>
+              </a:rPr>
+              <a:t>pretraining help?</a:t>
+            </a:r>
+          </a:p>
+        </p:txBody>
+      </p:sp>
+      <p:sp>
+        <p:nvSpPr>
+          <p:cNvPr id="4" name="TextBox 3"/>
+          <p:cNvSpPr txBox="1"/>
+          <p:nvPr/>
+        </p:nvSpPr>
+        <p:spPr>
+          <a:xfrm>
+            <a:off x="1097280" y="7680960"/>
+            <a:ext cx="16093440" cy="1645920"/>
+          </a:xfrm>
+          <a:prstGeom prst="rect">
+            <a:avLst/>
+          </a:prstGeom>
+          <a:noFill/>
+        </p:spPr>
+        <p:txBody>
+          <a:bodyPr wrap="square" anchor="ctr" lIns="50800" rIns="50800" tIns="25400" bIns="25400">
+            <a:spAutoFit/>
+          </a:bodyPr>
+          <a:lstStyle/>
+          <a:p>
+            <a:pPr algn="ctr">
               <a:spcAft>
                 <a:spcPts val="0"/>
               </a:spcAft>
               <a:buNone/>
             </a:pPr>
             <a:r>
-              <a:rPr sz="1600" b="0" i="1">
-                <a:solidFill>
-                  <a:srgbClr val="222222"/>
-                </a:solidFill>
-                <a:latin typeface="Open Sans"/>
-              </a:rPr>
-              <a:t>We cover BOTH architectures the brief asks for.</a:t>
+              <a:rPr sz="2600" b="1" i="0">
+                <a:solidFill>
+                  <a:srgbClr val="FFFFFF"/>
+                </a:solidFill>
+                <a:latin typeface="Open Sans"/>
+              </a:rPr>
+              <a:t>Scratch    -&gt;    ImageNet    -&gt;    Satellite Pretraining</a:t>
             </a:r>
           </a:p>
         </p:txBody>
@@ -3994,8 +5986,8 @@
         </p:nvSpPr>
         <p:spPr>
           <a:xfrm>
-            <a:off x="822960" y="502920"/>
-            <a:ext cx="16642080" cy="1188720"/>
+            <a:off x="822960" y="457200"/>
+            <a:ext cx="16642080" cy="1280160"/>
           </a:xfrm>
           <a:prstGeom prst="rect">
             <a:avLst/>
@@ -4003,7 +5995,7 @@
           <a:noFill/>
         </p:spPr>
         <p:txBody>
-          <a:bodyPr wrap="square" anchor="t" lIns="25400" rIns="25400" tIns="25400" bIns="25400">
+          <a:bodyPr wrap="square" anchor="t" lIns="50800" rIns="50800" tIns="25400" bIns="25400">
             <a:spAutoFit/>
           </a:bodyPr>
           <a:lstStyle/>
@@ -4015,36 +6007,129 @@
               <a:buNone/>
             </a:pPr>
             <a:r>
-              <a:rPr sz="3400" b="1" i="0">
+              <a:rPr sz="4000" b="1" i="0">
                 <a:solidFill>
                   <a:srgbClr val="6F0A19"/>
                 </a:solidFill>
                 <a:latin typeface="Open Sans"/>
               </a:rPr>
-              <a:t>Architecture and training pipeline</a:t>
-            </a:r>
-          </a:p>
-        </p:txBody>
-      </p:sp>
-      <p:sp>
-        <p:nvSpPr>
-          <p:cNvPr id="3" name="Rectangle 2"/>
+              <a:t>Dataset - LoveDA</a:t>
+            </a:r>
+          </a:p>
+        </p:txBody>
+      </p:sp>
+      <p:sp>
+        <p:nvSpPr>
+          <p:cNvPr id="3" name="TextBox 2"/>
+          <p:cNvSpPr txBox="1"/>
+          <p:nvPr/>
+        </p:nvSpPr>
+        <p:spPr>
+          <a:xfrm>
+            <a:off x="822960" y="2011680"/>
+            <a:ext cx="5669280" cy="5486400"/>
+          </a:xfrm>
+          <a:prstGeom prst="rect">
+            <a:avLst/>
+          </a:prstGeom>
+          <a:noFill/>
+        </p:spPr>
+        <p:txBody>
+          <a:bodyPr wrap="square" anchor="t" lIns="50800" rIns="50800" tIns="25400" bIns="25400">
+            <a:spAutoFit/>
+          </a:bodyPr>
+          <a:lstStyle/>
+          <a:p>
+            <a:pPr algn="l">
+              <a:spcAft>
+                <a:spcPts val="1800"/>
+              </a:spcAft>
+              <a:buNone/>
+            </a:pPr>
+            <a:r>
+              <a:rPr sz="3000" b="1" i="0">
+                <a:solidFill>
+                  <a:srgbClr val="6F0A19"/>
+                </a:solidFill>
+                <a:latin typeface="Open Sans"/>
+              </a:rPr>
+              <a:t>7 Classes</a:t>
+            </a:r>
+          </a:p>
+          <a:p>
+            <a:pPr algn="l">
+              <a:spcAft>
+                <a:spcPts val="1800"/>
+              </a:spcAft>
+              <a:buNone/>
+            </a:pPr>
+            <a:r>
+              <a:rPr sz="3000" b="1" i="0">
+                <a:solidFill>
+                  <a:srgbClr val="6F0A19"/>
+                </a:solidFill>
+                <a:latin typeface="Open Sans"/>
+              </a:rPr>
+              <a:t>Urban + Rural</a:t>
+            </a:r>
+          </a:p>
+          <a:p>
+            <a:pPr algn="l">
+              <a:spcAft>
+                <a:spcPts val="1800"/>
+              </a:spcAft>
+              <a:buNone/>
+            </a:pPr>
+            <a:r>
+              <a:rPr sz="3000" b="1" i="0">
+                <a:solidFill>
+                  <a:srgbClr val="6F0A19"/>
+                </a:solidFill>
+                <a:latin typeface="Open Sans"/>
+              </a:rPr>
+              <a:t>100 / 300 / 600 Images</a:t>
+            </a:r>
+          </a:p>
+          <a:p>
+            <a:pPr algn="l">
+              <a:spcAft>
+                <a:spcPts val="0"/>
+              </a:spcAft>
+              <a:buNone/>
+            </a:pPr>
+            <a:r>
+              <a:rPr sz="1800" b="0" i="1">
+                <a:solidFill>
+                  <a:srgbClr val="7A7A7A"/>
+                </a:solidFill>
+                <a:latin typeface="Open Sans"/>
+              </a:rPr>
+              <a:t>(data-scarce regime)</a:t>
+            </a:r>
+          </a:p>
+        </p:txBody>
+      </p:sp>
+      <p:sp>
+        <p:nvSpPr>
+          <p:cNvPr id="4" name="Rounded Rectangle 3"/>
           <p:cNvSpPr/>
           <p:nvPr/>
         </p:nvSpPr>
         <p:spPr>
           <a:xfrm>
-            <a:off x="914400" y="1920240"/>
-            <a:ext cx="7863840" cy="4937760"/>
-          </a:xfrm>
-          <a:prstGeom prst="rect">
+            <a:off x="6766560" y="1920240"/>
+            <a:ext cx="10607040" cy="6675120"/>
+          </a:xfrm>
+          <a:prstGeom prst="roundRect">
             <a:avLst/>
           </a:prstGeom>
           <a:solidFill>
-            <a:srgbClr val="F4ECEC"/>
+            <a:srgbClr val="ECECEC"/>
           </a:solidFill>
-          <a:ln>
-            <a:noFill/>
+          <a:ln w="15875">
+            <a:solidFill>
+              <a:srgbClr val="BCBCBC"/>
+            </a:solidFill>
           </a:ln>
           <a:effectLst/>
         </p:spPr>
@@ -4063,343 +6148,18 @@
           </a:fontRef>
         </p:style>
         <p:txBody>
-          <a:bodyPr rtlCol="0" anchor="ctr"/>
+          <a:bodyPr rtlCol="0" anchor="ctr" wrap="square"/>
           <a:lstStyle/>
           <a:p>
             <a:pPr algn="ctr"/>
-          </a:p>
-        </p:txBody>
-      </p:sp>
-      <p:sp>
-        <p:nvSpPr>
-          <p:cNvPr id="4" name="TextBox 3"/>
-          <p:cNvSpPr txBox="1"/>
-          <p:nvPr/>
-        </p:nvSpPr>
-        <p:spPr>
-          <a:xfrm>
-            <a:off x="1280160" y="2194560"/>
-            <a:ext cx="7223760" cy="4480560"/>
-          </a:xfrm>
-          <a:prstGeom prst="rect">
-            <a:avLst/>
-          </a:prstGeom>
-          <a:noFill/>
-        </p:spPr>
-        <p:txBody>
-          <a:bodyPr wrap="square" anchor="t" lIns="25400" rIns="25400" tIns="25400" bIns="25400">
-            <a:spAutoFit/>
-          </a:bodyPr>
-          <a:lstStyle/>
-          <a:p>
-            <a:pPr algn="l">
-              <a:spcAft>
-                <a:spcPts val="800"/>
-              </a:spcAft>
-              <a:buNone/>
-            </a:pPr>
-            <a:r>
-              <a:rPr sz="1900" b="1" i="0">
-                <a:solidFill>
-                  <a:srgbClr val="6F0A19"/>
-                </a:solidFill>
-                <a:latin typeface="Open Sans"/>
-              </a:rPr>
-              <a:t>(A) Swin-T U-Net + RSP</a:t>
-            </a:r>
-          </a:p>
-          <a:p>
-            <a:pPr algn="l">
-              <a:spcAft>
-                <a:spcPts val="800"/>
-              </a:spcAft>
-              <a:buFont typeface="Arial"/>
-              <a:buChar char="-"/>
-            </a:pPr>
-            <a:r>
-              <a:rPr sz="1600" b="0" i="0">
-                <a:solidFill>
-                  <a:srgbClr val="222222"/>
-                </a:solidFill>
-                <a:latin typeface="Open Sans"/>
-              </a:rPr>
-              <a:t>Swin-Tiny backbone (segmentation-models-pytorch + timm).</a:t>
-            </a:r>
-          </a:p>
-          <a:p>
-            <a:pPr algn="l">
-              <a:spcAft>
-                <a:spcPts val="800"/>
-              </a:spcAft>
-              <a:buFont typeface="Arial"/>
-              <a:buChar char="-"/>
-            </a:pPr>
-            <a:r>
-              <a:rPr sz="1600" b="0" i="0">
-                <a:solidFill>
-                  <a:srgbClr val="222222"/>
-                </a:solidFill>
-                <a:latin typeface="Open Sans"/>
-              </a:rPr>
-              <a:t>RSP weights (pretraining on MillionAID).</a:t>
-            </a:r>
-          </a:p>
-          <a:p>
-            <a:pPr algn="l">
-              <a:spcAft>
-                <a:spcPts val="0"/>
-              </a:spcAft>
-              <a:buFont typeface="Arial"/>
-              <a:buChar char="-"/>
-            </a:pPr>
-            <a:r>
-              <a:rPr sz="1600" b="0" i="0">
-                <a:solidFill>
-                  <a:srgbClr val="222222"/>
-                </a:solidFill>
-                <a:latin typeface="Open Sans"/>
-              </a:rPr>
-              <a:t>Full fine-tuning, with encoder warmup.</a:t>
-            </a:r>
-          </a:p>
-        </p:txBody>
-      </p:sp>
-      <p:sp>
-        <p:nvSpPr>
-          <p:cNvPr id="5" name="Rectangle 4"/>
-          <p:cNvSpPr/>
-          <p:nvPr/>
-        </p:nvSpPr>
-        <p:spPr>
-          <a:xfrm>
-            <a:off x="9144000" y="1920240"/>
-            <a:ext cx="8229600" cy="4937760"/>
-          </a:xfrm>
-          <a:prstGeom prst="rect">
-            <a:avLst/>
-          </a:prstGeom>
-          <a:solidFill>
-            <a:srgbClr val="F4ECEC"/>
-          </a:solidFill>
-          <a:ln>
-            <a:noFill/>
-          </a:ln>
-          <a:effectLst/>
-        </p:spPr>
-        <p:style>
-          <a:lnRef idx="1">
-            <a:schemeClr val="accent1"/>
-          </a:lnRef>
-          <a:fillRef idx="3">
-            <a:schemeClr val="accent1"/>
-          </a:fillRef>
-          <a:effectRef idx="2">
-            <a:schemeClr val="accent1"/>
-          </a:effectRef>
-          <a:fontRef idx="minor">
-            <a:schemeClr val="lt1"/>
-          </a:fontRef>
-        </p:style>
-        <p:txBody>
-          <a:bodyPr rtlCol="0" anchor="ctr"/>
-          <a:lstStyle/>
-          <a:p>
-            <a:pPr algn="ctr"/>
-          </a:p>
-        </p:txBody>
-      </p:sp>
-      <p:sp>
-        <p:nvSpPr>
-          <p:cNvPr id="6" name="TextBox 5"/>
-          <p:cNvSpPr txBox="1"/>
-          <p:nvPr/>
-        </p:nvSpPr>
-        <p:spPr>
-          <a:xfrm>
-            <a:off x="9509760" y="2194560"/>
-            <a:ext cx="7589520" cy="4480560"/>
-          </a:xfrm>
-          <a:prstGeom prst="rect">
-            <a:avLst/>
-          </a:prstGeom>
-          <a:noFill/>
-        </p:spPr>
-        <p:txBody>
-          <a:bodyPr wrap="square" anchor="t" lIns="25400" rIns="25400" tIns="25400" bIns="25400">
-            <a:spAutoFit/>
-          </a:bodyPr>
-          <a:lstStyle/>
-          <a:p>
-            <a:pPr algn="l">
-              <a:spcAft>
-                <a:spcPts val="800"/>
-              </a:spcAft>
-              <a:buNone/>
-            </a:pPr>
-            <a:r>
-              <a:rPr sz="1900" b="1" i="0">
-                <a:solidFill>
-                  <a:srgbClr val="6F0A19"/>
-                </a:solidFill>
-                <a:latin typeface="Open Sans"/>
-              </a:rPr>
-              <a:t>(B) SatMAE++ ViT-L (frozen)</a:t>
-            </a:r>
-          </a:p>
-          <a:p>
-            <a:pPr algn="l">
-              <a:spcAft>
-                <a:spcPts val="800"/>
-              </a:spcAft>
-              <a:buFont typeface="Arial"/>
-              <a:buChar char="-"/>
-            </a:pPr>
-            <a:r>
-              <a:rPr sz="1600" b="0" i="0">
-                <a:solidFill>
-                  <a:srgbClr val="222222"/>
-                </a:solidFill>
-                <a:latin typeface="Open Sans"/>
-              </a:rPr>
-              <a:t>ViT-L fMoW-RGB encoder FROZEN (linear probing).</a:t>
-            </a:r>
-          </a:p>
-          <a:p>
-            <a:pPr algn="l">
-              <a:spcAft>
-                <a:spcPts val="800"/>
-              </a:spcAft>
-              <a:buFont typeface="Arial"/>
-              <a:buChar char="-"/>
-            </a:pPr>
-            <a:r>
-              <a:rPr sz="1600" b="0" i="0">
-                <a:solidFill>
-                  <a:srgbClr val="222222"/>
-                </a:solidFill>
-                <a:latin typeface="Open Sans"/>
-              </a:rPr>
-              <a:t>Lightweight convolutional decoder (progressive upsampling).</a:t>
-            </a:r>
-          </a:p>
-          <a:p>
-            <a:pPr algn="l">
-              <a:spcAft>
-                <a:spcPts val="0"/>
-              </a:spcAft>
-              <a:buFont typeface="Arial"/>
-              <a:buChar char="-"/>
-            </a:pPr>
-            <a:r>
-              <a:rPr sz="1600" b="0" i="0">
-                <a:solidFill>
-                  <a:srgbClr val="222222"/>
-                </a:solidFill>
-                <a:latin typeface="Open Sans"/>
-              </a:rPr>
-              <a:t>300M params but no backprop in the encoder -&gt; runs in minutes on T4.</a:t>
-            </a:r>
-          </a:p>
-        </p:txBody>
-      </p:sp>
-      <p:sp>
-        <p:nvSpPr>
-          <p:cNvPr id="7" name="TextBox 6"/>
-          <p:cNvSpPr txBox="1"/>
-          <p:nvPr/>
-        </p:nvSpPr>
-        <p:spPr>
-          <a:xfrm>
-            <a:off x="914400" y="7223760"/>
-            <a:ext cx="16459200" cy="2377440"/>
-          </a:xfrm>
-          <a:prstGeom prst="rect">
-            <a:avLst/>
-          </a:prstGeom>
-          <a:noFill/>
-        </p:spPr>
-        <p:txBody>
-          <a:bodyPr wrap="square" anchor="t" lIns="25400" rIns="25400" tIns="25400" bIns="25400">
-            <a:spAutoFit/>
-          </a:bodyPr>
-          <a:lstStyle/>
-          <a:p>
-            <a:pPr algn="l">
-              <a:spcAft>
-                <a:spcPts val="800"/>
-              </a:spcAft>
-              <a:buNone/>
-            </a:pPr>
-            <a:r>
-              <a:rPr sz="1800" b="1" i="0">
-                <a:solidFill>
-                  <a:srgbClr val="1F497D"/>
-                </a:solidFill>
-                <a:latin typeface="Open Sans"/>
-              </a:rPr>
-              <a:t>Common choices (for a fair comparison)</a:t>
-            </a:r>
-          </a:p>
-          <a:p>
-            <a:pPr algn="l">
-              <a:spcAft>
-                <a:spcPts val="0"/>
-              </a:spcAft>
-              <a:buNone/>
-            </a:pPr>
-            <a:r>
-              <a:rPr sz="1600" b="1" i="0">
-                <a:solidFill>
-                  <a:srgbClr val="222222"/>
-                </a:solidFill>
-                <a:latin typeface="Open Sans"/>
-              </a:rPr>
-              <a:t>Loss: </a:t>
-            </a:r>
-            <a:r>
-              <a:rPr sz="1600" b="0" i="0">
-                <a:solidFill>
-                  <a:srgbClr val="222222"/>
-                </a:solidFill>
-                <a:latin typeface="Open Sans"/>
-              </a:rPr>
-              <a:t>CrossEntropy + Dice, with ignore_index on LoveDA 'no-data'.   </a:t>
-            </a:r>
-            <a:r>
-              <a:rPr sz="1600" b="1" i="0">
-                <a:solidFill>
-                  <a:srgbClr val="222222"/>
-                </a:solidFill>
-                <a:latin typeface="Open Sans"/>
-              </a:rPr>
-              <a:t>Class-weighting: </a:t>
-            </a:r>
-            <a:r>
-              <a:rPr sz="1600" b="0" i="0">
-                <a:solidFill>
-                  <a:srgbClr val="222222"/>
-                </a:solidFill>
-                <a:latin typeface="Open Sans"/>
-              </a:rPr>
-              <a:t>median-frequency on rare classes (road, water).   </a:t>
-            </a:r>
-            <a:r>
-              <a:rPr sz="1600" b="1" i="0">
-                <a:solidFill>
-                  <a:srgbClr val="222222"/>
-                </a:solidFill>
-                <a:latin typeface="Open Sans"/>
-              </a:rPr>
-              <a:t>Data-scarce: </a:t>
-            </a:r>
-            <a:r>
-              <a:rPr sz="1600" b="0" i="0">
-                <a:solidFill>
-                  <a:srgbClr val="222222"/>
-                </a:solidFill>
-                <a:latin typeface="Open Sans"/>
-              </a:rPr>
-              <a:t>subsets of 100 / 300 / 600 images.</a:t>
+            <a:r>
+              <a:rPr sz="1500" i="1">
+                <a:solidFill>
+                  <a:srgbClr val="7A7A7A"/>
+                </a:solidFill>
+                <a:latin typeface="Open Sans"/>
+              </a:rPr>
+              <a:t>[ IMAGE: LoveDA patches ]</a:t>
             </a:r>
           </a:p>
         </p:txBody>
@@ -4430,8 +6190,8 @@
         </p:nvSpPr>
         <p:spPr>
           <a:xfrm>
-            <a:off x="822960" y="502920"/>
-            <a:ext cx="16642080" cy="1188720"/>
+            <a:off x="822960" y="457200"/>
+            <a:ext cx="16642080" cy="1280160"/>
           </a:xfrm>
           <a:prstGeom prst="rect">
             <a:avLst/>
@@ -4439,7 +6199,7 @@
           <a:noFill/>
         </p:spPr>
         <p:txBody>
-          <a:bodyPr wrap="square" anchor="t" lIns="25400" rIns="25400" tIns="25400" bIns="25400">
+          <a:bodyPr wrap="square" anchor="t" lIns="50800" rIns="50800" tIns="25400" bIns="25400">
             <a:spAutoFit/>
           </a:bodyPr>
           <a:lstStyle/>
@@ -4451,76 +6211,38 @@
               <a:buNone/>
             </a:pPr>
             <a:r>
-              <a:rPr sz="3400" b="1" i="0">
+              <a:rPr sz="4000" b="1" i="0">
                 <a:solidFill>
                   <a:srgbClr val="6F0A19"/>
                 </a:solidFill>
                 <a:latin typeface="Open Sans"/>
               </a:rPr>
-              <a:t>Does pretraining help? Yes, a lot</a:t>
-            </a:r>
-          </a:p>
-        </p:txBody>
-      </p:sp>
-      <p:sp>
-        <p:nvSpPr>
-          <p:cNvPr id="3" name="TextBox 2"/>
-          <p:cNvSpPr txBox="1"/>
-          <p:nvPr/>
-        </p:nvSpPr>
-        <p:spPr>
-          <a:xfrm>
-            <a:off x="914400" y="1783080"/>
-            <a:ext cx="16459200" cy="640080"/>
-          </a:xfrm>
-          <a:prstGeom prst="rect">
-            <a:avLst/>
-          </a:prstGeom>
-          <a:noFill/>
-        </p:spPr>
-        <p:txBody>
-          <a:bodyPr wrap="square" anchor="t" lIns="25400" rIns="25400" tIns="25400" bIns="25400">
-            <a:spAutoFit/>
-          </a:bodyPr>
-          <a:lstStyle/>
-          <a:p>
-            <a:pPr algn="l">
-              <a:spcAft>
-                <a:spcPts val="0"/>
-              </a:spcAft>
-              <a:buNone/>
-            </a:pPr>
-            <a:r>
-              <a:rPr sz="1800" b="0" i="0">
-                <a:solidFill>
-                  <a:srgbClr val="222222"/>
-                </a:solidFill>
-                <a:latin typeface="Open Sans"/>
-              </a:rPr>
-              <a:t>Data-scarce ablation on LoveDA (n=300 images, mIoU - same pipeline):</a:t>
-            </a:r>
-          </a:p>
-        </p:txBody>
-      </p:sp>
-      <p:sp>
-        <p:nvSpPr>
-          <p:cNvPr id="4" name="Rectangle 3"/>
+              <a:t>Two Pretraining Strategies</a:t>
+            </a:r>
+          </a:p>
+        </p:txBody>
+      </p:sp>
+      <p:sp>
+        <p:nvSpPr>
+          <p:cNvPr id="3" name="Rounded Rectangle 2"/>
           <p:cNvSpPr/>
           <p:nvPr/>
         </p:nvSpPr>
         <p:spPr>
           <a:xfrm>
-            <a:off x="914400" y="2651760"/>
-            <a:ext cx="5120640" cy="3200400"/>
-          </a:xfrm>
-          <a:prstGeom prst="rect">
+            <a:off x="914400" y="1920240"/>
+            <a:ext cx="16459200" cy="4572000"/>
+          </a:xfrm>
+          <a:prstGeom prst="roundRect">
             <a:avLst/>
           </a:prstGeom>
           <a:solidFill>
-            <a:srgbClr val="F4ECEC"/>
+            <a:srgbClr val="ECECEC"/>
           </a:solidFill>
-          <a:ln>
-            <a:noFill/>
+          <a:ln w="15875">
+            <a:solidFill>
+              <a:srgbClr val="BCBCBC"/>
+            </a:solidFill>
           </a:ln>
           <a:effectLst/>
         </p:spPr>
@@ -4539,23 +6261,32 @@
           </a:fontRef>
         </p:style>
         <p:txBody>
-          <a:bodyPr rtlCol="0" anchor="ctr"/>
+          <a:bodyPr rtlCol="0" anchor="ctr" wrap="square"/>
           <a:lstStyle/>
           <a:p>
             <a:pPr algn="ctr"/>
-          </a:p>
-        </p:txBody>
-      </p:sp>
-      <p:sp>
-        <p:nvSpPr>
-          <p:cNvPr id="5" name="TextBox 4"/>
+            <a:r>
+              <a:rPr sz="1500" i="1">
+                <a:solidFill>
+                  <a:srgbClr val="7A7A7A"/>
+                </a:solidFill>
+                <a:latin typeface="Open Sans"/>
+              </a:rPr>
+              <a:t>[ SCHEMA: Swin  &lt;-  RSP        |        ViT-L  &lt;-  SatMAE++ ]</a:t>
+            </a:r>
+          </a:p>
+        </p:txBody>
+      </p:sp>
+      <p:sp>
+        <p:nvSpPr>
+          <p:cNvPr id="4" name="TextBox 3"/>
           <p:cNvSpPr txBox="1"/>
           <p:nvPr/>
         </p:nvSpPr>
         <p:spPr>
           <a:xfrm>
-            <a:off x="1097280" y="2788920"/>
-            <a:ext cx="4754880" cy="2926080"/>
+            <a:off x="914400" y="6766560"/>
+            <a:ext cx="16459200" cy="2194560"/>
           </a:xfrm>
           <a:prstGeom prst="rect">
             <a:avLst/>
@@ -4563,450 +6294,42 @@
           <a:noFill/>
         </p:spPr>
         <p:txBody>
-          <a:bodyPr wrap="square" anchor="ctr" lIns="25400" rIns="25400" tIns="25400" bIns="25400">
+          <a:bodyPr wrap="square" anchor="t" lIns="50800" rIns="50800" tIns="25400" bIns="25400">
             <a:spAutoFit/>
           </a:bodyPr>
           <a:lstStyle/>
           <a:p>
             <a:pPr algn="ctr">
               <a:spcAft>
-                <a:spcPts val="200"/>
-              </a:spcAft>
-              <a:buNone/>
-            </a:pPr>
-            <a:r>
-              <a:rPr sz="2200" b="1" i="0">
+                <a:spcPts val="800"/>
+              </a:spcAft>
+              <a:buNone/>
+            </a:pPr>
+            <a:r>
+              <a:rPr sz="2800" b="1" i="0">
                 <a:solidFill>
                   <a:srgbClr val="6F0A19"/>
                 </a:solidFill>
                 <a:latin typeface="Open Sans"/>
               </a:rPr>
-              <a:t>Scratch</a:t>
+              <a:t>Different Architectures   -   Different Pretraining</a:t>
             </a:r>
           </a:p>
           <a:p>
             <a:pPr algn="ctr">
               <a:spcAft>
-                <a:spcPts val="200"/>
-              </a:spcAft>
-              <a:buNone/>
-            </a:pPr>
-            <a:r>
-              <a:rPr sz="6600" b="1" i="0">
-                <a:solidFill>
-                  <a:srgbClr val="6B6B6B"/>
-                </a:solidFill>
-                <a:latin typeface="Open Sans"/>
-              </a:rPr>
-              <a:t>0.09</a:t>
-            </a:r>
-          </a:p>
-          <a:p>
-            <a:pPr algn="ctr">
-              <a:spcAft>
                 <a:spcPts val="0"/>
               </a:spcAft>
               <a:buNone/>
             </a:pPr>
             <a:r>
-              <a:rPr sz="1500" b="0" i="0">
-                <a:solidFill>
-                  <a:srgbClr val="222222"/>
-                </a:solidFill>
-                <a:latin typeface="Open Sans"/>
-              </a:rPr>
-              <a:t>Swin random</a:t>
-            </a:r>
-          </a:p>
-          <a:p>
-            <a:pPr algn="ctr">
-              <a:spcAft>
-                <a:spcPts val="0"/>
-              </a:spcAft>
-              <a:buNone/>
-            </a:pPr>
-            <a:r>
-              <a:rPr sz="1500" b="0" i="0">
-                <a:solidFill>
-                  <a:srgbClr val="222222"/>
-                </a:solidFill>
-                <a:latin typeface="Open Sans"/>
-              </a:rPr>
-              <a:t>(no pretraining)</a:t>
-            </a:r>
-          </a:p>
-        </p:txBody>
-      </p:sp>
-      <p:sp>
-        <p:nvSpPr>
-          <p:cNvPr id="6" name="Rectangle 5"/>
-          <p:cNvSpPr/>
-          <p:nvPr/>
-        </p:nvSpPr>
-        <p:spPr>
-          <a:xfrm>
-            <a:off x="6400800" y="2651760"/>
-            <a:ext cx="5120640" cy="3200400"/>
-          </a:xfrm>
-          <a:prstGeom prst="rect">
-            <a:avLst/>
-          </a:prstGeom>
-          <a:solidFill>
-            <a:srgbClr val="F4ECEC"/>
-          </a:solidFill>
-          <a:ln>
-            <a:noFill/>
-          </a:ln>
-          <a:effectLst/>
-        </p:spPr>
-        <p:style>
-          <a:lnRef idx="1">
-            <a:schemeClr val="accent1"/>
-          </a:lnRef>
-          <a:fillRef idx="3">
-            <a:schemeClr val="accent1"/>
-          </a:fillRef>
-          <a:effectRef idx="2">
-            <a:schemeClr val="accent1"/>
-          </a:effectRef>
-          <a:fontRef idx="minor">
-            <a:schemeClr val="lt1"/>
-          </a:fontRef>
-        </p:style>
-        <p:txBody>
-          <a:bodyPr rtlCol="0" anchor="ctr"/>
-          <a:lstStyle/>
-          <a:p>
-            <a:pPr algn="ctr"/>
-          </a:p>
-        </p:txBody>
-      </p:sp>
-      <p:sp>
-        <p:nvSpPr>
-          <p:cNvPr id="7" name="TextBox 6"/>
-          <p:cNvSpPr txBox="1"/>
-          <p:nvPr/>
-        </p:nvSpPr>
-        <p:spPr>
-          <a:xfrm>
-            <a:off x="6583680" y="2788920"/>
-            <a:ext cx="4754880" cy="2926080"/>
-          </a:xfrm>
-          <a:prstGeom prst="rect">
-            <a:avLst/>
-          </a:prstGeom>
-          <a:noFill/>
-        </p:spPr>
-        <p:txBody>
-          <a:bodyPr wrap="square" anchor="ctr" lIns="25400" rIns="25400" tIns="25400" bIns="25400">
-            <a:spAutoFit/>
-          </a:bodyPr>
-          <a:lstStyle/>
-          <a:p>
-            <a:pPr algn="ctr">
-              <a:spcAft>
-                <a:spcPts val="200"/>
-              </a:spcAft>
-              <a:buNone/>
-            </a:pPr>
-            <a:r>
-              <a:rPr sz="2200" b="1" i="0">
-                <a:solidFill>
-                  <a:srgbClr val="6F0A19"/>
-                </a:solidFill>
-                <a:latin typeface="Open Sans"/>
-              </a:rPr>
-              <a:t>RSP</a:t>
-            </a:r>
-          </a:p>
-          <a:p>
-            <a:pPr algn="ctr">
-              <a:spcAft>
-                <a:spcPts val="200"/>
-              </a:spcAft>
-              <a:buNone/>
-            </a:pPr>
-            <a:r>
-              <a:rPr sz="6600" b="1" i="0">
-                <a:solidFill>
-                  <a:srgbClr val="1F497D"/>
-                </a:solidFill>
-                <a:latin typeface="Open Sans"/>
-              </a:rPr>
-              <a:t>0.25</a:t>
-            </a:r>
-          </a:p>
-          <a:p>
-            <a:pPr algn="ctr">
-              <a:spcAft>
-                <a:spcPts val="0"/>
-              </a:spcAft>
-              <a:buNone/>
-            </a:pPr>
-            <a:r>
-              <a:rPr sz="1500" b="0" i="0">
-                <a:solidFill>
-                  <a:srgbClr val="222222"/>
-                </a:solidFill>
-                <a:latin typeface="Open Sans"/>
-              </a:rPr>
-              <a:t>Swin + satellite</a:t>
-            </a:r>
-          </a:p>
-          <a:p>
-            <a:pPr algn="ctr">
-              <a:spcAft>
-                <a:spcPts val="0"/>
-              </a:spcAft>
-              <a:buNone/>
-            </a:pPr>
-            <a:r>
-              <a:rPr sz="1500" b="0" i="0">
-                <a:solidFill>
-                  <a:srgbClr val="222222"/>
-                </a:solidFill>
-                <a:latin typeface="Open Sans"/>
-              </a:rPr>
-              <a:t>weights</a:t>
-            </a:r>
-          </a:p>
-        </p:txBody>
-      </p:sp>
-      <p:sp>
-        <p:nvSpPr>
-          <p:cNvPr id="8" name="Rectangle 7"/>
-          <p:cNvSpPr/>
-          <p:nvPr/>
-        </p:nvSpPr>
-        <p:spPr>
-          <a:xfrm>
-            <a:off x="11887200" y="2651760"/>
-            <a:ext cx="5120640" cy="3200400"/>
-          </a:xfrm>
-          <a:prstGeom prst="rect">
-            <a:avLst/>
-          </a:prstGeom>
-          <a:solidFill>
-            <a:srgbClr val="F4ECEC"/>
-          </a:solidFill>
-          <a:ln>
-            <a:noFill/>
-          </a:ln>
-          <a:effectLst/>
-        </p:spPr>
-        <p:style>
-          <a:lnRef idx="1">
-            <a:schemeClr val="accent1"/>
-          </a:lnRef>
-          <a:fillRef idx="3">
-            <a:schemeClr val="accent1"/>
-          </a:fillRef>
-          <a:effectRef idx="2">
-            <a:schemeClr val="accent1"/>
-          </a:effectRef>
-          <a:fontRef idx="minor">
-            <a:schemeClr val="lt1"/>
-          </a:fontRef>
-        </p:style>
-        <p:txBody>
-          <a:bodyPr rtlCol="0" anchor="ctr"/>
-          <a:lstStyle/>
-          <a:p>
-            <a:pPr algn="ctr"/>
-          </a:p>
-        </p:txBody>
-      </p:sp>
-      <p:sp>
-        <p:nvSpPr>
-          <p:cNvPr id="9" name="TextBox 8"/>
-          <p:cNvSpPr txBox="1"/>
-          <p:nvPr/>
-        </p:nvSpPr>
-        <p:spPr>
-          <a:xfrm>
-            <a:off x="12070080" y="2788920"/>
-            <a:ext cx="4754880" cy="2926080"/>
-          </a:xfrm>
-          <a:prstGeom prst="rect">
-            <a:avLst/>
-          </a:prstGeom>
-          <a:noFill/>
-        </p:spPr>
-        <p:txBody>
-          <a:bodyPr wrap="square" anchor="ctr" lIns="25400" rIns="25400" tIns="25400" bIns="25400">
-            <a:spAutoFit/>
-          </a:bodyPr>
-          <a:lstStyle/>
-          <a:p>
-            <a:pPr algn="ctr">
-              <a:spcAft>
-                <a:spcPts val="200"/>
-              </a:spcAft>
-              <a:buNone/>
-            </a:pPr>
-            <a:r>
-              <a:rPr sz="2200" b="1" i="0">
-                <a:solidFill>
-                  <a:srgbClr val="6F0A19"/>
-                </a:solidFill>
-                <a:latin typeface="Open Sans"/>
-              </a:rPr>
-              <a:t>SatMAE++</a:t>
-            </a:r>
-          </a:p>
-          <a:p>
-            <a:pPr algn="ctr">
-              <a:spcAft>
-                <a:spcPts val="200"/>
-              </a:spcAft>
-              <a:buNone/>
-            </a:pPr>
-            <a:r>
-              <a:rPr sz="6600" b="1" i="0">
-                <a:solidFill>
-                  <a:srgbClr val="2E7D32"/>
-                </a:solidFill>
-                <a:latin typeface="Open Sans"/>
-              </a:rPr>
-              <a:t>0.31</a:t>
-            </a:r>
-          </a:p>
-          <a:p>
-            <a:pPr algn="ctr">
-              <a:spcAft>
-                <a:spcPts val="0"/>
-              </a:spcAft>
-              <a:buNone/>
-            </a:pPr>
-            <a:r>
-              <a:rPr sz="1500" b="0" i="0">
-                <a:solidFill>
-                  <a:srgbClr val="222222"/>
-                </a:solidFill>
-                <a:latin typeface="Open Sans"/>
-              </a:rPr>
-              <a:t>ViT-L frozen</a:t>
-            </a:r>
-          </a:p>
-          <a:p>
-            <a:pPr algn="ctr">
-              <a:spcAft>
-                <a:spcPts val="0"/>
-              </a:spcAft>
-              <a:buNone/>
-            </a:pPr>
-            <a:r>
-              <a:rPr sz="1500" b="0" i="0">
-                <a:solidFill>
-                  <a:srgbClr val="222222"/>
-                </a:solidFill>
-                <a:latin typeface="Open Sans"/>
-              </a:rPr>
-              <a:t>(linear probing)</a:t>
-            </a:r>
-          </a:p>
-        </p:txBody>
-      </p:sp>
-      <p:sp>
-        <p:nvSpPr>
-          <p:cNvPr id="10" name="TextBox 9"/>
-          <p:cNvSpPr txBox="1"/>
-          <p:nvPr/>
-        </p:nvSpPr>
-        <p:spPr>
-          <a:xfrm>
-            <a:off x="914400" y="6217920"/>
-            <a:ext cx="16459200" cy="3291840"/>
-          </a:xfrm>
-          <a:prstGeom prst="rect">
-            <a:avLst/>
-          </a:prstGeom>
-          <a:noFill/>
-        </p:spPr>
-        <p:txBody>
-          <a:bodyPr wrap="square" anchor="t" lIns="25400" rIns="25400" tIns="25400" bIns="25400">
-            <a:spAutoFit/>
-          </a:bodyPr>
-          <a:lstStyle/>
-          <a:p>
-            <a:pPr algn="l">
-              <a:spcAft>
-                <a:spcPts val="1200"/>
-              </a:spcAft>
-              <a:buFont typeface="Arial"/>
-              <a:buChar char="-"/>
-            </a:pPr>
-            <a:r>
-              <a:rPr sz="1800" b="1" i="0">
-                <a:solidFill>
-                  <a:srgbClr val="6F0A19"/>
-                </a:solidFill>
-                <a:latin typeface="Open Sans"/>
-              </a:rPr>
-              <a:t>Key insight: </a:t>
-            </a:r>
-            <a:r>
-              <a:rPr sz="1800" b="0" i="0">
-                <a:solidFill>
-                  <a:srgbClr val="6F0A19"/>
-                </a:solidFill>
-                <a:latin typeface="Open Sans"/>
-              </a:rPr>
-              <a:t>a FROZEN ViT-L beats the fine-tuned Swin -&gt; SatMAE++ features are so strong they suffice on their own.</a:t>
-            </a:r>
-          </a:p>
-          <a:p>
-            <a:pPr algn="l">
-              <a:spcAft>
-                <a:spcPts val="1200"/>
-              </a:spcAft>
-              <a:buFont typeface="Arial"/>
-              <a:buChar char="-"/>
-            </a:pPr>
-            <a:r>
-              <a:rPr sz="1800" b="1" i="0">
-                <a:solidFill>
-                  <a:srgbClr val="222222"/>
-                </a:solidFill>
-                <a:latin typeface="Open Sans"/>
-              </a:rPr>
-              <a:t>Class-weighting: </a:t>
-            </a:r>
-            <a:r>
-              <a:rPr sz="1800" b="0" i="0">
-                <a:solidFill>
-                  <a:srgbClr val="222222"/>
-                </a:solidFill>
-                <a:latin typeface="Open Sans"/>
-              </a:rPr>
-              <a:t>+~0.07 mIoU, recovering rare classes (road, water go from ~0 to a useful IoU).</a:t>
-            </a:r>
-          </a:p>
-          <a:p>
-            <a:pPr algn="l">
-              <a:spcAft>
-                <a:spcPts val="0"/>
-              </a:spcAft>
-              <a:buFont typeface="Arial"/>
-              <a:buChar char="-"/>
-            </a:pPr>
-            <a:r>
-              <a:rPr sz="1800" b="1" i="0">
-                <a:solidFill>
-                  <a:srgbClr val="222222"/>
-                </a:solidFill>
-                <a:latin typeface="Open Sans"/>
-              </a:rPr>
-              <a:t>Confirmed ordering: </a:t>
-            </a:r>
-            <a:r>
-              <a:rPr sz="1800" b="0" i="0">
-                <a:solidFill>
-                  <a:srgbClr val="222222"/>
-                </a:solidFill>
-                <a:latin typeface="Open Sans"/>
-              </a:rPr>
-              <a:t>SatMAE++ &gt; RSP &gt; scratch, consistently.</a:t>
+              <a:rPr sz="1800" b="0" i="1">
+                <a:solidFill>
+                  <a:srgbClr val="7A7A7A"/>
+                </a:solidFill>
+                <a:latin typeface="Open Sans"/>
+              </a:rPr>
+              <a:t>weights are not interchangeable</a:t>
             </a:r>
           </a:p>
         </p:txBody>
@@ -5037,8 +6360,8 @@
         </p:nvSpPr>
         <p:spPr>
           <a:xfrm>
-            <a:off x="822960" y="502920"/>
-            <a:ext cx="16642080" cy="1188720"/>
+            <a:off x="822960" y="457200"/>
+            <a:ext cx="16642080" cy="1280160"/>
           </a:xfrm>
           <a:prstGeom prst="rect">
             <a:avLst/>
@@ -5046,7 +6369,7 @@
           <a:noFill/>
         </p:spPr>
         <p:txBody>
-          <a:bodyPr wrap="square" anchor="t" lIns="25400" rIns="25400" tIns="25400" bIns="25400">
+          <a:bodyPr wrap="square" anchor="t" lIns="50800" rIns="50800" tIns="25400" bIns="25400">
             <a:spAutoFit/>
           </a:bodyPr>
           <a:lstStyle/>
@@ -5058,76 +6381,38 @@
               <a:buNone/>
             </a:pPr>
             <a:r>
-              <a:rPr sz="3400" b="1" i="0">
+              <a:rPr sz="4000" b="1" i="0">
                 <a:solidFill>
                   <a:srgbClr val="6F0A19"/>
                 </a:solidFill>
                 <a:latin typeface="Open Sans"/>
               </a:rPr>
-              <a:t>Input optimization: GSD vs context</a:t>
-            </a:r>
-          </a:p>
-        </p:txBody>
-      </p:sp>
-      <p:sp>
-        <p:nvSpPr>
-          <p:cNvPr id="3" name="TextBox 2"/>
-          <p:cNvSpPr txBox="1"/>
-          <p:nvPr/>
-        </p:nvSpPr>
-        <p:spPr>
-          <a:xfrm>
-            <a:off x="914400" y="1828800"/>
-            <a:ext cx="16459200" cy="640080"/>
-          </a:xfrm>
-          <a:prstGeom prst="rect">
-            <a:avLst/>
-          </a:prstGeom>
-          <a:noFill/>
-        </p:spPr>
-        <p:txBody>
-          <a:bodyPr wrap="square" anchor="t" lIns="25400" rIns="25400" tIns="25400" bIns="25400">
-            <a:spAutoFit/>
-          </a:bodyPr>
-          <a:lstStyle/>
-          <a:p>
-            <a:pPr algn="l">
-              <a:spcAft>
-                <a:spcPts val="0"/>
-              </a:spcAft>
-              <a:buNone/>
-            </a:pPr>
-            <a:r>
-              <a:rPr sz="1800" b="0" i="0">
-                <a:solidFill>
-                  <a:srgbClr val="222222"/>
-                </a:solidFill>
-                <a:latin typeface="Open Sans"/>
-              </a:rPr>
-              <a:t>Images are 1024x1024 but the model wants 224x224. How do we get there?</a:t>
-            </a:r>
-          </a:p>
-        </p:txBody>
-      </p:sp>
-      <p:sp>
-        <p:nvSpPr>
-          <p:cNvPr id="4" name="Rectangle 3"/>
+              <a:t>Why SatMAE++?</a:t>
+            </a:r>
+          </a:p>
+        </p:txBody>
+      </p:sp>
+      <p:sp>
+        <p:nvSpPr>
+          <p:cNvPr id="3" name="Rounded Rectangle 2"/>
           <p:cNvSpPr/>
           <p:nvPr/>
         </p:nvSpPr>
         <p:spPr>
           <a:xfrm>
-            <a:off x="914400" y="2743200"/>
-            <a:ext cx="5120640" cy="4206240"/>
-          </a:xfrm>
-          <a:prstGeom prst="rect">
+            <a:off x="914400" y="1920240"/>
+            <a:ext cx="16459200" cy="5120640"/>
+          </a:xfrm>
+          <a:prstGeom prst="roundRect">
             <a:avLst/>
           </a:prstGeom>
           <a:solidFill>
-            <a:srgbClr val="F4ECEC"/>
+            <a:srgbClr val="ECECEC"/>
           </a:solidFill>
-          <a:ln>
-            <a:noFill/>
+          <a:ln w="15875">
+            <a:solidFill>
+              <a:srgbClr val="BCBCBC"/>
+            </a:solidFill>
           </a:ln>
           <a:effectLst/>
         </p:spPr>
@@ -5146,23 +6431,32 @@
           </a:fontRef>
         </p:style>
         <p:txBody>
-          <a:bodyPr rtlCol="0" anchor="ctr"/>
+          <a:bodyPr rtlCol="0" anchor="ctr" wrap="square"/>
           <a:lstStyle/>
           <a:p>
             <a:pPr algn="ctr"/>
-          </a:p>
-        </p:txBody>
-      </p:sp>
-      <p:sp>
-        <p:nvSpPr>
-          <p:cNvPr id="5" name="TextBox 4"/>
+            <a:r>
+              <a:rPr sz="1500" i="1">
+                <a:solidFill>
+                  <a:srgbClr val="7A7A7A"/>
+                </a:solidFill>
+                <a:latin typeface="Open Sans"/>
+              </a:rPr>
+              <a:t>[ SCHEMA: Masked Autoencoder (mask -&gt; encode -&gt; reconstruct) ]</a:t>
+            </a:r>
+          </a:p>
+        </p:txBody>
+      </p:sp>
+      <p:sp>
+        <p:nvSpPr>
+          <p:cNvPr id="4" name="TextBox 3"/>
           <p:cNvSpPr txBox="1"/>
           <p:nvPr/>
         </p:nvSpPr>
         <p:spPr>
           <a:xfrm>
-            <a:off x="1143000" y="2926080"/>
-            <a:ext cx="4663440" cy="3840480"/>
+            <a:off x="914400" y="7315200"/>
+            <a:ext cx="16459200" cy="1463040"/>
           </a:xfrm>
           <a:prstGeom prst="rect">
             <a:avLst/>
@@ -5170,497 +6464,25 @@
           <a:noFill/>
         </p:spPr>
         <p:txBody>
-          <a:bodyPr wrap="square" anchor="t" lIns="25400" rIns="25400" tIns="25400" bIns="25400">
+          <a:bodyPr wrap="square" anchor="ctr" lIns="50800" rIns="50800" tIns="25400" bIns="25400">
             <a:spAutoFit/>
           </a:bodyPr>
           <a:lstStyle/>
           <a:p>
-            <a:pPr algn="l">
-              <a:spcAft>
-                <a:spcPts val="800"/>
-              </a:spcAft>
-              <a:buNone/>
-            </a:pPr>
-            <a:r>
-              <a:rPr sz="1800" b="1" i="0">
+            <a:pPr algn="ctr">
+              <a:spcAft>
+                <a:spcPts val="0"/>
+              </a:spcAft>
+              <a:buNone/>
+            </a:pPr>
+            <a:r>
+              <a:rPr sz="3000" b="1" i="0">
                 <a:solidFill>
                   <a:srgbClr val="6F0A19"/>
                 </a:solidFill>
                 <a:latin typeface="Open Sans"/>
               </a:rPr>
-              <a:t>Resize 1024-&gt;224</a:t>
-            </a:r>
-          </a:p>
-          <a:p>
-            <a:pPr algn="l">
-              <a:spcAft>
-                <a:spcPts val="200"/>
-              </a:spcAft>
-              <a:buNone/>
-            </a:pPr>
-            <a:r>
-              <a:rPr sz="1600" b="0" i="0">
-                <a:solidFill>
-                  <a:srgbClr val="222222"/>
-                </a:solidFill>
-                <a:latin typeface="Open Sans"/>
-              </a:rPr>
-              <a:t>Whole scene but detail</a:t>
-            </a:r>
-          </a:p>
-          <a:p>
-            <a:pPr algn="l">
-              <a:spcAft>
-                <a:spcPts val="200"/>
-              </a:spcAft>
-              <a:buNone/>
-            </a:pPr>
-            <a:r>
-              <a:rPr sz="1600" b="0" i="0">
-                <a:solidFill>
-                  <a:srgbClr val="222222"/>
-                </a:solidFill>
-                <a:latin typeface="Open Sans"/>
-              </a:rPr>
-              <a:t>destroyed (high freq. lost).</a:t>
-            </a:r>
-          </a:p>
-          <a:p>
-            <a:pPr algn="l">
-              <a:spcAft>
-                <a:spcPts val="200"/>
-              </a:spcAft>
-              <a:buNone/>
-            </a:pPr>
-            <a:r>
-              <a:rPr sz="600" b="0" i="0">
-                <a:solidFill>
-                  <a:srgbClr val="222222"/>
-                </a:solidFill>
-                <a:latin typeface="Open Sans"/>
-              </a:rPr>
-              <a:t/>
-            </a:r>
-          </a:p>
-          <a:p>
-            <a:pPr algn="l">
-              <a:spcAft>
-                <a:spcPts val="0"/>
-              </a:spcAft>
-              <a:buNone/>
-            </a:pPr>
-            <a:r>
-              <a:rPr sz="1500" b="1" i="0">
-                <a:solidFill>
-                  <a:srgbClr val="1F497D"/>
-                </a:solidFill>
-                <a:latin typeface="Open Sans"/>
-              </a:rPr>
-              <a:t>100% area</a:t>
-            </a:r>
-          </a:p>
-          <a:p>
-            <a:pPr algn="l">
-              <a:spcAft>
-                <a:spcPts val="0"/>
-              </a:spcAft>
-              <a:buNone/>
-            </a:pPr>
-            <a:r>
-              <a:rPr sz="1500" b="1" i="0">
-                <a:solidFill>
-                  <a:srgbClr val="1F497D"/>
-                </a:solidFill>
-                <a:latin typeface="Open Sans"/>
-              </a:rPr>
-              <a:t>~4.5x downscale</a:t>
-            </a:r>
-          </a:p>
-        </p:txBody>
-      </p:sp>
-      <p:sp>
-        <p:nvSpPr>
-          <p:cNvPr id="6" name="Rectangle 5"/>
-          <p:cNvSpPr/>
-          <p:nvPr/>
-        </p:nvSpPr>
-        <p:spPr>
-          <a:xfrm>
-            <a:off x="6400800" y="2743200"/>
-            <a:ext cx="5120640" cy="4206240"/>
-          </a:xfrm>
-          <a:prstGeom prst="rect">
-            <a:avLst/>
-          </a:prstGeom>
-          <a:solidFill>
-            <a:srgbClr val="F4ECEC"/>
-          </a:solidFill>
-          <a:ln>
-            <a:noFill/>
-          </a:ln>
-          <a:effectLst/>
-        </p:spPr>
-        <p:style>
-          <a:lnRef idx="1">
-            <a:schemeClr val="accent1"/>
-          </a:lnRef>
-          <a:fillRef idx="3">
-            <a:schemeClr val="accent1"/>
-          </a:fillRef>
-          <a:effectRef idx="2">
-            <a:schemeClr val="accent1"/>
-          </a:effectRef>
-          <a:fontRef idx="minor">
-            <a:schemeClr val="lt1"/>
-          </a:fontRef>
-        </p:style>
-        <p:txBody>
-          <a:bodyPr rtlCol="0" anchor="ctr"/>
-          <a:lstStyle/>
-          <a:p>
-            <a:pPr algn="ctr"/>
-          </a:p>
-        </p:txBody>
-      </p:sp>
-      <p:sp>
-        <p:nvSpPr>
-          <p:cNvPr id="7" name="TextBox 6"/>
-          <p:cNvSpPr txBox="1"/>
-          <p:nvPr/>
-        </p:nvSpPr>
-        <p:spPr>
-          <a:xfrm>
-            <a:off x="6629400" y="2926080"/>
-            <a:ext cx="4663440" cy="3840480"/>
-          </a:xfrm>
-          <a:prstGeom prst="rect">
-            <a:avLst/>
-          </a:prstGeom>
-          <a:noFill/>
-        </p:spPr>
-        <p:txBody>
-          <a:bodyPr wrap="square" anchor="t" lIns="25400" rIns="25400" tIns="25400" bIns="25400">
-            <a:spAutoFit/>
-          </a:bodyPr>
-          <a:lstStyle/>
-          <a:p>
-            <a:pPr algn="l">
-              <a:spcAft>
-                <a:spcPts val="800"/>
-              </a:spcAft>
-              <a:buNone/>
-            </a:pPr>
-            <a:r>
-              <a:rPr sz="1800" b="1" i="0">
-                <a:solidFill>
-                  <a:srgbClr val="6F0A19"/>
-                </a:solidFill>
-                <a:latin typeface="Open Sans"/>
-              </a:rPr>
-              <a:t>Native crop 224</a:t>
-            </a:r>
-          </a:p>
-          <a:p>
-            <a:pPr algn="l">
-              <a:spcAft>
-                <a:spcPts val="200"/>
-              </a:spcAft>
-              <a:buNone/>
-            </a:pPr>
-            <a:r>
-              <a:rPr sz="1600" b="0" i="0">
-                <a:solidFill>
-                  <a:srgbClr val="222222"/>
-                </a:solidFill>
-                <a:latin typeface="Open Sans"/>
-              </a:rPr>
-              <a:t>Maximum sharpness but sees</a:t>
-            </a:r>
-          </a:p>
-          <a:p>
-            <a:pPr algn="l">
-              <a:spcAft>
-                <a:spcPts val="200"/>
-              </a:spcAft>
-              <a:buNone/>
-            </a:pPr>
-            <a:r>
-              <a:rPr sz="1600" b="0" i="0">
-                <a:solidFill>
-                  <a:srgbClr val="222222"/>
-                </a:solidFill>
-                <a:latin typeface="Open Sans"/>
-              </a:rPr>
-              <a:t>only a small portion.</a:t>
-            </a:r>
-          </a:p>
-          <a:p>
-            <a:pPr algn="l">
-              <a:spcAft>
-                <a:spcPts val="200"/>
-              </a:spcAft>
-              <a:buNone/>
-            </a:pPr>
-            <a:r>
-              <a:rPr sz="600" b="0" i="0">
-                <a:solidFill>
-                  <a:srgbClr val="222222"/>
-                </a:solidFill>
-                <a:latin typeface="Open Sans"/>
-              </a:rPr>
-              <a:t/>
-            </a:r>
-          </a:p>
-          <a:p>
-            <a:pPr algn="l">
-              <a:spcAft>
-                <a:spcPts val="0"/>
-              </a:spcAft>
-              <a:buNone/>
-            </a:pPr>
-            <a:r>
-              <a:rPr sz="1500" b="1" i="0">
-                <a:solidFill>
-                  <a:srgbClr val="1F497D"/>
-                </a:solidFill>
-                <a:latin typeface="Open Sans"/>
-              </a:rPr>
-              <a:t>~5% area</a:t>
-            </a:r>
-          </a:p>
-          <a:p>
-            <a:pPr algn="l">
-              <a:spcAft>
-                <a:spcPts val="0"/>
-              </a:spcAft>
-              <a:buNone/>
-            </a:pPr>
-            <a:r>
-              <a:rPr sz="1500" b="1" i="0">
-                <a:solidFill>
-                  <a:srgbClr val="1F497D"/>
-                </a:solidFill>
-                <a:latin typeface="Open Sans"/>
-              </a:rPr>
-              <a:t>native resolution</a:t>
-            </a:r>
-          </a:p>
-        </p:txBody>
-      </p:sp>
-      <p:sp>
-        <p:nvSpPr>
-          <p:cNvPr id="8" name="Rectangle 7"/>
-          <p:cNvSpPr/>
-          <p:nvPr/>
-        </p:nvSpPr>
-        <p:spPr>
-          <a:xfrm>
-            <a:off x="11887200" y="2743200"/>
-            <a:ext cx="5120640" cy="4206240"/>
-          </a:xfrm>
-          <a:prstGeom prst="rect">
-            <a:avLst/>
-          </a:prstGeom>
-          <a:solidFill>
-            <a:srgbClr val="ECE6D9"/>
-          </a:solidFill>
-          <a:ln>
-            <a:noFill/>
-          </a:ln>
-          <a:effectLst/>
-        </p:spPr>
-        <p:style>
-          <a:lnRef idx="1">
-            <a:schemeClr val="accent1"/>
-          </a:lnRef>
-          <a:fillRef idx="3">
-            <a:schemeClr val="accent1"/>
-          </a:fillRef>
-          <a:effectRef idx="2">
-            <a:schemeClr val="accent1"/>
-          </a:effectRef>
-          <a:fontRef idx="minor">
-            <a:schemeClr val="lt1"/>
-          </a:fontRef>
-        </p:style>
-        <p:txBody>
-          <a:bodyPr rtlCol="0" anchor="ctr"/>
-          <a:lstStyle/>
-          <a:p>
-            <a:pPr algn="ctr"/>
-          </a:p>
-        </p:txBody>
-      </p:sp>
-      <p:sp>
-        <p:nvSpPr>
-          <p:cNvPr id="9" name="TextBox 8"/>
-          <p:cNvSpPr txBox="1"/>
-          <p:nvPr/>
-        </p:nvSpPr>
-        <p:spPr>
-          <a:xfrm>
-            <a:off x="12115800" y="2926080"/>
-            <a:ext cx="4663440" cy="3840480"/>
-          </a:xfrm>
-          <a:prstGeom prst="rect">
-            <a:avLst/>
-          </a:prstGeom>
-          <a:noFill/>
-        </p:spPr>
-        <p:txBody>
-          <a:bodyPr wrap="square" anchor="t" lIns="25400" rIns="25400" tIns="25400" bIns="25400">
-            <a:spAutoFit/>
-          </a:bodyPr>
-          <a:lstStyle/>
-          <a:p>
-            <a:pPr algn="l">
-              <a:spcAft>
-                <a:spcPts val="800"/>
-              </a:spcAft>
-              <a:buNone/>
-            </a:pPr>
-            <a:r>
-              <a:rPr sz="1800" b="1" i="0">
-                <a:solidFill>
-                  <a:srgbClr val="6F0A19"/>
-                </a:solidFill>
-                <a:latin typeface="Open Sans"/>
-              </a:rPr>
-              <a:t>Hybrid: resize 512 + crop 224</a:t>
-            </a:r>
-          </a:p>
-          <a:p>
-            <a:pPr algn="l">
-              <a:spcAft>
-                <a:spcPts val="200"/>
-              </a:spcAft>
-              <a:buNone/>
-            </a:pPr>
-            <a:r>
-              <a:rPr sz="1600" b="0" i="0">
-                <a:solidFill>
-                  <a:srgbClr val="222222"/>
-                </a:solidFill>
-                <a:latin typeface="Open Sans"/>
-              </a:rPr>
-              <a:t>Compromise: good detail</a:t>
-            </a:r>
-          </a:p>
-          <a:p>
-            <a:pPr algn="l">
-              <a:spcAft>
-                <a:spcPts val="200"/>
-              </a:spcAft>
-              <a:buNone/>
-            </a:pPr>
-            <a:r>
-              <a:rPr sz="1600" b="0" i="0">
-                <a:solidFill>
-                  <a:srgbClr val="222222"/>
-                </a:solidFill>
-                <a:latin typeface="Open Sans"/>
-              </a:rPr>
-              <a:t>AND some context.</a:t>
-            </a:r>
-          </a:p>
-          <a:p>
-            <a:pPr algn="l">
-              <a:spcAft>
-                <a:spcPts val="200"/>
-              </a:spcAft>
-              <a:buNone/>
-            </a:pPr>
-            <a:r>
-              <a:rPr sz="600" b="0" i="0">
-                <a:solidFill>
-                  <a:srgbClr val="222222"/>
-                </a:solidFill>
-                <a:latin typeface="Open Sans"/>
-              </a:rPr>
-              <a:t/>
-            </a:r>
-          </a:p>
-          <a:p>
-            <a:pPr algn="l">
-              <a:spcAft>
-                <a:spcPts val="0"/>
-              </a:spcAft>
-              <a:buNone/>
-            </a:pPr>
-            <a:r>
-              <a:rPr sz="1500" b="1" i="0">
-                <a:solidFill>
-                  <a:srgbClr val="1F497D"/>
-                </a:solidFill>
-                <a:latin typeface="Open Sans"/>
-              </a:rPr>
-              <a:t>~20% area</a:t>
-            </a:r>
-          </a:p>
-          <a:p>
-            <a:pPr algn="l">
-              <a:spcAft>
-                <a:spcPts val="0"/>
-              </a:spcAft>
-              <a:buNone/>
-            </a:pPr>
-            <a:r>
-              <a:rPr sz="1500" b="1" i="0">
-                <a:solidFill>
-                  <a:srgbClr val="1F497D"/>
-                </a:solidFill>
-                <a:latin typeface="Open Sans"/>
-              </a:rPr>
-              <a:t>half resolution</a:t>
-            </a:r>
-          </a:p>
-        </p:txBody>
-      </p:sp>
-      <p:sp>
-        <p:nvSpPr>
-          <p:cNvPr id="10" name="TextBox 9"/>
-          <p:cNvSpPr txBox="1"/>
-          <p:nvPr/>
-        </p:nvSpPr>
-        <p:spPr>
-          <a:xfrm>
-            <a:off x="914400" y="7315200"/>
-            <a:ext cx="16459200" cy="1828800"/>
-          </a:xfrm>
-          <a:prstGeom prst="rect">
-            <a:avLst/>
-          </a:prstGeom>
-          <a:noFill/>
-        </p:spPr>
-        <p:txBody>
-          <a:bodyPr wrap="square" anchor="t" lIns="25400" rIns="25400" tIns="25400" bIns="25400">
-            <a:spAutoFit/>
-          </a:bodyPr>
-          <a:lstStyle/>
-          <a:p>
-            <a:pPr algn="l">
-              <a:spcAft>
-                <a:spcPts val="0"/>
-              </a:spcAft>
-              <a:buNone/>
-            </a:pPr>
-            <a:r>
-              <a:rPr sz="1700" b="1" i="1">
-                <a:solidFill>
-                  <a:srgbClr val="6B6B6B"/>
-                </a:solidFill>
-                <a:latin typeface="Open Sans"/>
-              </a:rPr>
-              <a:t>Status: </a:t>
-            </a:r>
-            <a:r>
-              <a:rPr sz="1700" b="0" i="1">
-                <a:solidFill>
-                  <a:srgbClr val="6B6B6B"/>
-                </a:solidFill>
-                <a:latin typeface="Open Sans"/>
-              </a:rPr>
-              <a:t>resize / crop / hybrid comparison still IN PROGRESS - we decide from per-class mIoU (thin classes like road/building should benefit from native detail).</a:t>
+              <a:t>Learn from Millions of Unlabeled Satellite Images</a:t>
             </a:r>
           </a:p>
         </p:txBody>
@@ -5691,8 +6513,8 @@
         </p:nvSpPr>
         <p:spPr>
           <a:xfrm>
-            <a:off x="822960" y="502920"/>
-            <a:ext cx="16642080" cy="1188720"/>
+            <a:off x="822960" y="457200"/>
+            <a:ext cx="16642080" cy="1280160"/>
           </a:xfrm>
           <a:prstGeom prst="rect">
             <a:avLst/>
@@ -5700,7 +6522,7 @@
           <a:noFill/>
         </p:spPr>
         <p:txBody>
-          <a:bodyPr wrap="square" anchor="t" lIns="25400" rIns="25400" tIns="25400" bIns="25400">
+          <a:bodyPr wrap="square" anchor="t" lIns="50800" rIns="50800" tIns="25400" bIns="25400">
             <a:spAutoFit/>
           </a:bodyPr>
           <a:lstStyle/>
@@ -5712,167 +6534,38 @@
               <a:buNone/>
             </a:pPr>
             <a:r>
-              <a:rPr sz="3400" b="1" i="0">
+              <a:rPr sz="4000" b="1" i="0">
                 <a:solidFill>
                   <a:srgbClr val="6F0A19"/>
                 </a:solidFill>
                 <a:latin typeface="Open Sans"/>
               </a:rPr>
-              <a:t>Extension: wavelet strategies - a negative, explained</a:t>
-            </a:r>
-          </a:p>
-        </p:txBody>
-      </p:sp>
-      <p:sp>
-        <p:nvSpPr>
-          <p:cNvPr id="3" name="TextBox 2"/>
-          <p:cNvSpPr txBox="1"/>
-          <p:nvPr/>
-        </p:nvSpPr>
-        <p:spPr>
-          <a:xfrm>
-            <a:off x="914400" y="1828800"/>
-            <a:ext cx="10058400" cy="7772400"/>
-          </a:xfrm>
-          <a:prstGeom prst="rect">
-            <a:avLst/>
-          </a:prstGeom>
-          <a:noFill/>
-        </p:spPr>
-        <p:txBody>
-          <a:bodyPr wrap="square" anchor="t" lIns="25400" rIns="25400" tIns="25400" bIns="25400">
-            <a:spAutoFit/>
-          </a:bodyPr>
-          <a:lstStyle/>
-          <a:p>
-            <a:pPr algn="l">
-              <a:spcAft>
-                <a:spcPts val="1200"/>
-              </a:spcAft>
-              <a:buFont typeface="Arial"/>
-              <a:buChar char="-"/>
-            </a:pPr>
-            <a:r>
-              <a:rPr sz="1800" b="1" i="0">
-                <a:solidFill>
-                  <a:srgbClr val="222222"/>
-                </a:solidFill>
-                <a:latin typeface="Open Sans"/>
-              </a:rPr>
-              <a:t>Idea (ISPAMM): </a:t>
-            </a:r>
-            <a:r>
-              <a:rPr sz="1800" b="0" i="0">
-                <a:solidFill>
-                  <a:srgbClr val="222222"/>
-                </a:solidFill>
-                <a:latin typeface="Open Sans"/>
-              </a:rPr>
-              <a:t>use the Discrete Wavelet Transform to inject high frequencies (edges) and sharpen boundaries.</a:t>
-            </a:r>
-          </a:p>
-          <a:p>
-            <a:pPr algn="l">
-              <a:spcAft>
-                <a:spcPts val="1200"/>
-              </a:spcAft>
-              <a:buFont typeface="Arial"/>
-              <a:buChar char="-"/>
-            </a:pPr>
-            <a:r>
-              <a:rPr sz="1800" b="1" i="0">
-                <a:solidFill>
-                  <a:srgbClr val="222222"/>
-                </a:solidFill>
-                <a:latin typeface="Open Sans"/>
-              </a:rPr>
-              <a:t>What we tested: </a:t>
-            </a:r>
-            <a:r>
-              <a:rPr sz="1800" b="0" i="0">
-                <a:solidFill>
-                  <a:srgbClr val="222222"/>
-                </a:solidFill>
-                <a:latin typeface="Open Sans"/>
-              </a:rPr>
-              <a:t>wavelet as input augmentation AND decoder injection; on Swin and ViT; scratch and pretrained; n=100/300/600.</a:t>
-            </a:r>
-          </a:p>
-          <a:p>
-            <a:pPr algn="l">
-              <a:spcAft>
-                <a:spcPts val="1200"/>
-              </a:spcAft>
-              <a:buFont typeface="Arial"/>
-              <a:buChar char="-"/>
-            </a:pPr>
-            <a:r>
-              <a:rPr sz="1800" b="1" i="0">
-                <a:solidFill>
-                  <a:srgbClr val="6F0A19"/>
-                </a:solidFill>
-                <a:latin typeface="Open Sans"/>
-              </a:rPr>
-              <a:t>Outcome: </a:t>
-            </a:r>
-            <a:r>
-              <a:rPr sz="1800" b="0" i="0">
-                <a:solidFill>
-                  <a:srgbClr val="6F0A19"/>
-                </a:solidFill>
-                <a:latin typeface="Open Sans"/>
-              </a:rPr>
-              <a:t>NEUTRAL everywhere (differences within ~0.02 noise).</a:t>
-            </a:r>
-          </a:p>
-          <a:p>
-            <a:pPr algn="l">
-              <a:spcAft>
-                <a:spcPts val="0"/>
-              </a:spcAft>
-              <a:buFont typeface="Arial"/>
-              <a:buChar char="-"/>
-            </a:pPr>
-            <a:r>
-              <a:rPr sz="1800" b="1" i="0">
-                <a:solidFill>
-                  <a:srgbClr val="222222"/>
-                </a:solidFill>
-                <a:latin typeface="Open Sans"/>
-              </a:rPr>
-              <a:t>Why: </a:t>
-            </a:r>
-            <a:r>
-              <a:rPr sz="1800" b="0" i="0">
-                <a:solidFill>
-                  <a:srgbClr val="222222"/>
-                </a:solidFill>
-                <a:latin typeface="Open Sans"/>
-              </a:rPr>
-              <a:t>wavelets provide EDGES, but the bottleneck here is SEMANTICS. The literature uses wavelets where frequency matters (super-resolution, restoration, long-sequence), not in semantic segmentation.</a:t>
-            </a:r>
-          </a:p>
-        </p:txBody>
-      </p:sp>
-      <p:sp>
-        <p:nvSpPr>
-          <p:cNvPr id="4" name="Rectangle 3"/>
+              <a:t>GSD vs Context</a:t>
+            </a:r>
+          </a:p>
+        </p:txBody>
+      </p:sp>
+      <p:sp>
+        <p:nvSpPr>
+          <p:cNvPr id="3" name="Rounded Rectangle 2"/>
           <p:cNvSpPr/>
           <p:nvPr/>
         </p:nvSpPr>
         <p:spPr>
           <a:xfrm>
-            <a:off x="11430000" y="2011680"/>
-            <a:ext cx="5943600" cy="5669280"/>
-          </a:xfrm>
-          <a:prstGeom prst="rect">
+            <a:off x="914400" y="2011680"/>
+            <a:ext cx="5120640" cy="4023360"/>
+          </a:xfrm>
+          <a:prstGeom prst="roundRect">
             <a:avLst/>
           </a:prstGeom>
           <a:solidFill>
-            <a:srgbClr val="F4ECEC"/>
+            <a:srgbClr val="ECECEC"/>
           </a:solidFill>
-          <a:ln>
-            <a:noFill/>
+          <a:ln w="15875">
+            <a:solidFill>
+              <a:srgbClr val="BCBCBC"/>
+            </a:solidFill>
           </a:ln>
           <a:effectLst/>
         </p:spPr>
@@ -5891,23 +6584,32 @@
           </a:fontRef>
         </p:style>
         <p:txBody>
-          <a:bodyPr rtlCol="0" anchor="ctr"/>
+          <a:bodyPr rtlCol="0" anchor="ctr" wrap="square"/>
           <a:lstStyle/>
           <a:p>
             <a:pPr algn="ctr"/>
-          </a:p>
-        </p:txBody>
-      </p:sp>
-      <p:sp>
-        <p:nvSpPr>
-          <p:cNvPr id="5" name="TextBox 4"/>
+            <a:r>
+              <a:rPr sz="1500" i="1">
+                <a:solidFill>
+                  <a:srgbClr val="7A7A7A"/>
+                </a:solidFill>
+                <a:latin typeface="Open Sans"/>
+              </a:rPr>
+              <a:t>[ IMAGE: Resize ]</a:t>
+            </a:r>
+          </a:p>
+        </p:txBody>
+      </p:sp>
+      <p:sp>
+        <p:nvSpPr>
+          <p:cNvPr id="4" name="TextBox 3"/>
           <p:cNvSpPr txBox="1"/>
           <p:nvPr/>
         </p:nvSpPr>
         <p:spPr>
           <a:xfrm>
-            <a:off x="11795760" y="2286000"/>
-            <a:ext cx="5303520" cy="5120640"/>
+            <a:off x="914400" y="6309360"/>
+            <a:ext cx="5120640" cy="2194560"/>
           </a:xfrm>
           <a:prstGeom prst="rect">
             <a:avLst/>
@@ -5915,59 +6617,266 @@
           <a:noFill/>
         </p:spPr>
         <p:txBody>
-          <a:bodyPr wrap="square" anchor="ctr" lIns="25400" rIns="25400" tIns="25400" bIns="25400">
+          <a:bodyPr wrap="square" anchor="t" lIns="50800" rIns="50800" tIns="25400" bIns="25400">
             <a:spAutoFit/>
           </a:bodyPr>
           <a:lstStyle/>
           <a:p>
-            <a:pPr algn="l">
-              <a:spcAft>
-                <a:spcPts val="1000"/>
-              </a:spcAft>
-              <a:buNone/>
-            </a:pPr>
-            <a:r>
-              <a:rPr sz="1800" b="1" i="0">
-                <a:solidFill>
-                  <a:srgbClr val="6F0A19"/>
-                </a:solidFill>
-                <a:latin typeface="Open Sans"/>
-              </a:rPr>
-              <a:t>Critical thinking</a:t>
-            </a:r>
-          </a:p>
-          <a:p>
-            <a:pPr algn="l">
-              <a:spcAft>
-                <a:spcPts val="1000"/>
-              </a:spcAft>
-              <a:buNone/>
-            </a:pPr>
-            <a:r>
-              <a:rPr sz="1800" b="0" i="1">
-                <a:solidFill>
-                  <a:srgbClr val="222222"/>
-                </a:solidFill>
-                <a:latin typeface="Open Sans"/>
-              </a:rPr>
-              <a:t>A negative result, obtained with 6+ controlled experiments and explained mechanistically, is a scientific result - not a failure.</a:t>
-            </a:r>
-          </a:p>
-          <a:p>
-            <a:pPr algn="l">
+            <a:pPr algn="ctr">
+              <a:spcAft>
+                <a:spcPts val="600"/>
+              </a:spcAft>
+              <a:buNone/>
+            </a:pPr>
+            <a:r>
+              <a:rPr sz="2600" b="1" i="0">
+                <a:solidFill>
+                  <a:srgbClr val="1F497D"/>
+                </a:solidFill>
+                <a:latin typeface="Open Sans"/>
+              </a:rPr>
+              <a:t>Resize</a:t>
+            </a:r>
+          </a:p>
+          <a:p>
+            <a:pPr algn="ctr">
               <a:spcAft>
                 <a:spcPts val="0"/>
               </a:spcAft>
               <a:buNone/>
             </a:pPr>
             <a:r>
-              <a:rPr sz="1700" b="0" i="0">
+              <a:rPr sz="2200" b="1" i="0">
+                <a:solidFill>
+                  <a:srgbClr val="C01A2B"/>
+                </a:solidFill>
+                <a:latin typeface="Open Sans"/>
+              </a:rPr>
+              <a:t>✗  Detail Loss</a:t>
+            </a:r>
+          </a:p>
+        </p:txBody>
+      </p:sp>
+      <p:sp>
+        <p:nvSpPr>
+          <p:cNvPr id="5" name="Rounded Rectangle 4"/>
+          <p:cNvSpPr/>
+          <p:nvPr/>
+        </p:nvSpPr>
+        <p:spPr>
+          <a:xfrm>
+            <a:off x="6400800" y="2011680"/>
+            <a:ext cx="5120640" cy="4023360"/>
+          </a:xfrm>
+          <a:prstGeom prst="roundRect">
+            <a:avLst/>
+          </a:prstGeom>
+          <a:solidFill>
+            <a:srgbClr val="ECECEC"/>
+          </a:solidFill>
+          <a:ln w="15875">
+            <a:solidFill>
+              <a:srgbClr val="BCBCBC"/>
+            </a:solidFill>
+          </a:ln>
+          <a:effectLst/>
+        </p:spPr>
+        <p:style>
+          <a:lnRef idx="1">
+            <a:schemeClr val="accent1"/>
+          </a:lnRef>
+          <a:fillRef idx="3">
+            <a:schemeClr val="accent1"/>
+          </a:fillRef>
+          <a:effectRef idx="2">
+            <a:schemeClr val="accent1"/>
+          </a:effectRef>
+          <a:fontRef idx="minor">
+            <a:schemeClr val="lt1"/>
+          </a:fontRef>
+        </p:style>
+        <p:txBody>
+          <a:bodyPr rtlCol="0" anchor="ctr" wrap="square"/>
+          <a:lstStyle/>
+          <a:p>
+            <a:pPr algn="ctr"/>
+            <a:r>
+              <a:rPr sz="1500" i="1">
+                <a:solidFill>
+                  <a:srgbClr val="7A7A7A"/>
+                </a:solidFill>
+                <a:latin typeface="Open Sans"/>
+              </a:rPr>
+              <a:t>[ IMAGE: Crop ]</a:t>
+            </a:r>
+          </a:p>
+        </p:txBody>
+      </p:sp>
+      <p:sp>
+        <p:nvSpPr>
+          <p:cNvPr id="6" name="TextBox 5"/>
+          <p:cNvSpPr txBox="1"/>
+          <p:nvPr/>
+        </p:nvSpPr>
+        <p:spPr>
+          <a:xfrm>
+            <a:off x="6400800" y="6309360"/>
+            <a:ext cx="5120640" cy="2194560"/>
+          </a:xfrm>
+          <a:prstGeom prst="rect">
+            <a:avLst/>
+          </a:prstGeom>
+          <a:noFill/>
+        </p:spPr>
+        <p:txBody>
+          <a:bodyPr wrap="square" anchor="t" lIns="50800" rIns="50800" tIns="25400" bIns="25400">
+            <a:spAutoFit/>
+          </a:bodyPr>
+          <a:lstStyle/>
+          <a:p>
+            <a:pPr algn="ctr">
+              <a:spcAft>
+                <a:spcPts val="600"/>
+              </a:spcAft>
+              <a:buNone/>
+            </a:pPr>
+            <a:r>
+              <a:rPr sz="2600" b="1" i="0">
                 <a:solidFill>
                   <a:srgbClr val="1F497D"/>
                 </a:solidFill>
                 <a:latin typeface="Open Sans"/>
               </a:rPr>
-              <a:t>It even reinforces the thesis: SatMAE++ pretraining already captures what wavelets would add.</a:t>
+              <a:t>Crop</a:t>
+            </a:r>
+          </a:p>
+          <a:p>
+            <a:pPr algn="ctr">
+              <a:spcAft>
+                <a:spcPts val="0"/>
+              </a:spcAft>
+              <a:buNone/>
+            </a:pPr>
+            <a:r>
+              <a:rPr sz="2200" b="1" i="0">
+                <a:solidFill>
+                  <a:srgbClr val="C01A2B"/>
+                </a:solidFill>
+                <a:latin typeface="Open Sans"/>
+              </a:rPr>
+              <a:t>✗  Context Loss</a:t>
+            </a:r>
+          </a:p>
+        </p:txBody>
+      </p:sp>
+      <p:sp>
+        <p:nvSpPr>
+          <p:cNvPr id="7" name="Rounded Rectangle 6"/>
+          <p:cNvSpPr/>
+          <p:nvPr/>
+        </p:nvSpPr>
+        <p:spPr>
+          <a:xfrm>
+            <a:off x="11887200" y="2011680"/>
+            <a:ext cx="5120640" cy="4023360"/>
+          </a:xfrm>
+          <a:prstGeom prst="roundRect">
+            <a:avLst/>
+          </a:prstGeom>
+          <a:solidFill>
+            <a:srgbClr val="ECECEC"/>
+          </a:solidFill>
+          <a:ln w="15875">
+            <a:solidFill>
+              <a:srgbClr val="BCBCBC"/>
+            </a:solidFill>
+          </a:ln>
+          <a:effectLst/>
+        </p:spPr>
+        <p:style>
+          <a:lnRef idx="1">
+            <a:schemeClr val="accent1"/>
+          </a:lnRef>
+          <a:fillRef idx="3">
+            <a:schemeClr val="accent1"/>
+          </a:fillRef>
+          <a:effectRef idx="2">
+            <a:schemeClr val="accent1"/>
+          </a:effectRef>
+          <a:fontRef idx="minor">
+            <a:schemeClr val="lt1"/>
+          </a:fontRef>
+        </p:style>
+        <p:txBody>
+          <a:bodyPr rtlCol="0" anchor="ctr" wrap="square"/>
+          <a:lstStyle/>
+          <a:p>
+            <a:pPr algn="ctr"/>
+            <a:r>
+              <a:rPr sz="1500" i="1">
+                <a:solidFill>
+                  <a:srgbClr val="7A7A7A"/>
+                </a:solidFill>
+                <a:latin typeface="Open Sans"/>
+              </a:rPr>
+              <a:t>[ IMAGE: Hybrid ]</a:t>
+            </a:r>
+          </a:p>
+        </p:txBody>
+      </p:sp>
+      <p:sp>
+        <p:nvSpPr>
+          <p:cNvPr id="8" name="TextBox 7"/>
+          <p:cNvSpPr txBox="1"/>
+          <p:nvPr/>
+        </p:nvSpPr>
+        <p:spPr>
+          <a:xfrm>
+            <a:off x="11887200" y="6309360"/>
+            <a:ext cx="5120640" cy="2194560"/>
+          </a:xfrm>
+          <a:prstGeom prst="rect">
+            <a:avLst/>
+          </a:prstGeom>
+          <a:noFill/>
+        </p:spPr>
+        <p:txBody>
+          <a:bodyPr wrap="square" anchor="t" lIns="50800" rIns="50800" tIns="25400" bIns="25400">
+            <a:spAutoFit/>
+          </a:bodyPr>
+          <a:lstStyle/>
+          <a:p>
+            <a:pPr algn="ctr">
+              <a:spcAft>
+                <a:spcPts val="600"/>
+              </a:spcAft>
+              <a:buNone/>
+            </a:pPr>
+            <a:r>
+              <a:rPr sz="2600" b="1" i="0">
+                <a:solidFill>
+                  <a:srgbClr val="1F497D"/>
+                </a:solidFill>
+                <a:latin typeface="Open Sans"/>
+              </a:rPr>
+              <a:t>Hybrid</a:t>
+            </a:r>
+          </a:p>
+          <a:p>
+            <a:pPr algn="ctr">
+              <a:spcAft>
+                <a:spcPts val="0"/>
+              </a:spcAft>
+              <a:buNone/>
+            </a:pPr>
+            <a:r>
+              <a:rPr sz="2200" b="1" i="0">
+                <a:solidFill>
+                  <a:srgbClr val="2E7D32"/>
+                </a:solidFill>
+                <a:latin typeface="Open Sans"/>
+              </a:rPr>
+              <a:t>✓  Best Trade-off</a:t>
             </a:r>
           </a:p>
         </p:txBody>
@@ -5998,8 +6907,8 @@
         </p:nvSpPr>
         <p:spPr>
           <a:xfrm>
-            <a:off x="822960" y="502920"/>
-            <a:ext cx="16642080" cy="1188720"/>
+            <a:off x="822960" y="457200"/>
+            <a:ext cx="16642080" cy="1280160"/>
           </a:xfrm>
           <a:prstGeom prst="rect">
             <a:avLst/>
@@ -6007,7 +6916,7 @@
           <a:noFill/>
         </p:spPr>
         <p:txBody>
-          <a:bodyPr wrap="square" anchor="t" lIns="25400" rIns="25400" tIns="25400" bIns="25400">
+          <a:bodyPr wrap="square" anchor="t" lIns="50800" rIns="50800" tIns="25400" bIns="25400">
             <a:spAutoFit/>
           </a:bodyPr>
           <a:lstStyle/>
@@ -6019,27 +6928,82 @@
               <a:buNone/>
             </a:pPr>
             <a:r>
-              <a:rPr sz="3400" b="1" i="0">
+              <a:rPr sz="4000" b="1" i="0">
                 <a:solidFill>
                   <a:srgbClr val="6F0A19"/>
                 </a:solidFill>
                 <a:latin typeface="Open Sans"/>
               </a:rPr>
-              <a:t>Open questions and future work</a:t>
-            </a:r>
-          </a:p>
-        </p:txBody>
-      </p:sp>
-      <p:sp>
-        <p:nvSpPr>
-          <p:cNvPr id="3" name="TextBox 2"/>
+              <a:t>Experimental Setup</a:t>
+            </a:r>
+          </a:p>
+        </p:txBody>
+      </p:sp>
+      <p:sp>
+        <p:nvSpPr>
+          <p:cNvPr id="3" name="Rounded Rectangle 2"/>
+          <p:cNvSpPr/>
+          <p:nvPr/>
+        </p:nvSpPr>
+        <p:spPr>
+          <a:xfrm>
+            <a:off x="914400" y="1920240"/>
+            <a:ext cx="16459200" cy="4572000"/>
+          </a:xfrm>
+          <a:prstGeom prst="roundRect">
+            <a:avLst/>
+          </a:prstGeom>
+          <a:solidFill>
+            <a:srgbClr val="ECECEC"/>
+          </a:solidFill>
+          <a:ln w="15875">
+            <a:solidFill>
+              <a:srgbClr val="BCBCBC"/>
+            </a:solidFill>
+          </a:ln>
+          <a:effectLst/>
+        </p:spPr>
+        <p:style>
+          <a:lnRef idx="1">
+            <a:schemeClr val="accent1"/>
+          </a:lnRef>
+          <a:fillRef idx="3">
+            <a:schemeClr val="accent1"/>
+          </a:fillRef>
+          <a:effectRef idx="2">
+            <a:schemeClr val="accent1"/>
+          </a:effectRef>
+          <a:fontRef idx="minor">
+            <a:schemeClr val="lt1"/>
+          </a:fontRef>
+        </p:style>
+        <p:txBody>
+          <a:bodyPr rtlCol="0" anchor="ctr" wrap="square"/>
+          <a:lstStyle/>
+          <a:p>
+            <a:pPr algn="ctr"/>
+            <a:r>
+              <a:rPr sz="1500" i="1">
+                <a:solidFill>
+                  <a:srgbClr val="7A7A7A"/>
+                </a:solidFill>
+                <a:latin typeface="Open Sans"/>
+              </a:rPr>
+              <a:t>[ WORKFLOW: LoveDA -&gt; Transformer Encoder -&gt; Decoder -&gt; Segmentation Map ]</a:t>
+            </a:r>
+          </a:p>
+        </p:txBody>
+      </p:sp>
+      <p:sp>
+        <p:nvSpPr>
+          <p:cNvPr id="4" name="TextBox 3"/>
           <p:cNvSpPr txBox="1"/>
           <p:nvPr/>
         </p:nvSpPr>
         <p:spPr>
           <a:xfrm>
-            <a:off x="914400" y="2011680"/>
-            <a:ext cx="16459200" cy="7315200"/>
+            <a:off x="914400" y="6858000"/>
+            <a:ext cx="16459200" cy="1463040"/>
           </a:xfrm>
           <a:prstGeom prst="rect">
             <a:avLst/>
@@ -6047,143 +7011,25 @@
           <a:noFill/>
         </p:spPr>
         <p:txBody>
-          <a:bodyPr wrap="square" anchor="t" lIns="25400" rIns="25400" tIns="25400" bIns="25400">
+          <a:bodyPr wrap="square" anchor="ctr" lIns="50800" rIns="50800" tIns="25400" bIns="25400">
             <a:spAutoFit/>
           </a:bodyPr>
           <a:lstStyle/>
           <a:p>
-            <a:pPr algn="l">
-              <a:spcAft>
-                <a:spcPts val="1400"/>
-              </a:spcAft>
-              <a:buFont typeface="Arial"/>
-              <a:buChar char="-"/>
-            </a:pPr>
-            <a:r>
-              <a:rPr sz="1900" b="1" i="0">
-                <a:solidFill>
-                  <a:srgbClr val="222222"/>
-                </a:solidFill>
-                <a:latin typeface="Open Sans"/>
-              </a:rPr>
-              <a:t>[deciding] Final input mode: </a:t>
-            </a:r>
-            <a:r>
-              <a:rPr sz="1900" b="0" i="0">
-                <a:solidFill>
-                  <a:srgbClr val="222222"/>
-                </a:solidFill>
-                <a:latin typeface="Open Sans"/>
-              </a:rPr>
-              <a:t>full resize vs hybrid 512+crop - based on per-class results.</a:t>
-            </a:r>
-          </a:p>
-          <a:p>
-            <a:pPr algn="l">
-              <a:spcAft>
-                <a:spcPts val="1400"/>
-              </a:spcAft>
-              <a:buFont typeface="Arial"/>
-              <a:buChar char="-"/>
-            </a:pPr>
-            <a:r>
-              <a:rPr sz="1900" b="1" i="0">
-                <a:solidFill>
-                  <a:srgbClr val="222222"/>
-                </a:solidFill>
-                <a:latin typeface="Open Sans"/>
-              </a:rPr>
-              <a:t>[deciding] Partial fine-tuning of the ViT: </a:t>
-            </a:r>
-            <a:r>
-              <a:rPr sz="1900" b="0" i="0">
-                <a:solidFill>
-                  <a:srgbClr val="222222"/>
-                </a:solidFill>
-                <a:latin typeface="Open Sans"/>
-              </a:rPr>
-              <a:t>unfreeze the last SatMAE++ blocks vs keep it frozen.</a:t>
-            </a:r>
-          </a:p>
-          <a:p>
-            <a:pPr algn="l">
-              <a:spcAft>
-                <a:spcPts val="1400"/>
-              </a:spcAft>
-              <a:buFont typeface="Arial"/>
-              <a:buChar char="-"/>
-            </a:pPr>
-            <a:r>
-              <a:rPr sz="1900" b="1" i="0">
-                <a:solidFill>
-                  <a:srgbClr val="222222"/>
-                </a:solidFill>
-                <a:latin typeface="Open Sans"/>
-              </a:rPr>
-              <a:t>Stage 2 - Multispectral: </a:t>
-            </a:r>
-            <a:r>
-              <a:rPr sz="1900" b="0" i="0">
-                <a:solidFill>
-                  <a:srgbClr val="222222"/>
-                </a:solidFill>
-                <a:latin typeface="Open Sans"/>
-              </a:rPr>
-              <a:t>SatMAE++ fMoW-Sentinel (11 bands) on Sentinel-2 data -&gt; the brief's "multi-spectral inputs" option.</a:t>
-            </a:r>
-          </a:p>
-          <a:p>
-            <a:pPr algn="l">
-              <a:spcAft>
-                <a:spcPts val="1400"/>
-              </a:spcAft>
-              <a:buFont typeface="Arial"/>
-              <a:buChar char="-"/>
-            </a:pPr>
-            <a:r>
-              <a:rPr sz="1900" b="1" i="0">
-                <a:solidFill>
-                  <a:srgbClr val="222222"/>
-                </a:solidFill>
-                <a:latin typeface="Open Sans"/>
-              </a:rPr>
-              <a:t>SAM / SAMRS as annotator: </a:t>
-            </a:r>
-            <a:r>
-              <a:rPr sz="1900" b="0" i="0">
-                <a:solidFill>
-                  <a:srgbClr val="222222"/>
-                </a:solidFill>
-                <a:latin typeface="Open Sans"/>
-              </a:rPr>
-              <a:t>generate pseudo-labels on unlabeled images to enlarge the training set (semi-supervised).</a:t>
-            </a:r>
-          </a:p>
-          <a:p>
-            <a:pPr algn="l">
+            <a:pPr algn="ctr">
               <a:spcAft>
                 <a:spcPts val="0"/>
               </a:spcAft>
-              <a:buFont typeface="Arial"/>
-              <a:buChar char="-"/>
-            </a:pPr>
-            <a:r>
-              <a:rPr sz="1900" b="1" i="0">
-                <a:solidFill>
-                  <a:srgbClr val="222222"/>
-                </a:solidFill>
-                <a:latin typeface="Open Sans"/>
-              </a:rPr>
-              <a:t>Wavelets 'in the positive': </a:t>
-            </a:r>
-            <a:r>
-              <a:rPr sz="1900" b="0" i="0">
-                <a:solidFill>
-                  <a:srgbClr val="222222"/>
-                </a:solidFill>
-                <a:latin typeface="Open Sans"/>
-              </a:rPr>
-              <a:t>test on an edge-dominated dataset (building/road extraction), where frequency truly is the metric.</a:t>
+              <a:buNone/>
+            </a:pPr>
+            <a:r>
+              <a:rPr sz="3000" b="1" i="0">
+                <a:solidFill>
+                  <a:srgbClr val="6F0A19"/>
+                </a:solidFill>
+                <a:latin typeface="Open Sans"/>
+              </a:rPr>
+              <a:t>Scratch        RSP        SatMAE++</a:t>
             </a:r>
           </a:p>
         </p:txBody>
@@ -6258,8 +7104,8 @@
         </p:nvSpPr>
         <p:spPr>
           <a:xfrm>
-            <a:off x="822960" y="548640"/>
-            <a:ext cx="16642080" cy="1188720"/>
+            <a:off x="1097280" y="3474720"/>
+            <a:ext cx="16093440" cy="4206240"/>
           </a:xfrm>
           <a:prstGeom prst="rect">
             <a:avLst/>
@@ -6267,156 +7113,25 @@
           <a:noFill/>
         </p:spPr>
         <p:txBody>
-          <a:bodyPr wrap="square" anchor="t" lIns="25400" rIns="25400" tIns="25400" bIns="25400">
+          <a:bodyPr wrap="square" anchor="ctr" lIns="50800" rIns="50800" tIns="25400" bIns="25400">
             <a:spAutoFit/>
           </a:bodyPr>
           <a:lstStyle/>
           <a:p>
-            <a:pPr algn="l">
-              <a:spcAft>
-                <a:spcPts val="0"/>
-              </a:spcAft>
-              <a:buNone/>
-            </a:pPr>
-            <a:r>
-              <a:rPr sz="3600" b="1" i="0">
+            <a:pPr algn="ctr">
+              <a:spcAft>
+                <a:spcPts val="1600"/>
+              </a:spcAft>
+              <a:buNone/>
+            </a:pPr>
+            <a:r>
+              <a:rPr sz="5200" b="1" i="0">
                 <a:solidFill>
                   <a:srgbClr val="FFFFFF"/>
                 </a:solidFill>
                 <a:latin typeface="Open Sans"/>
               </a:rPr>
-              <a:t>Conclusions</a:t>
-            </a:r>
-          </a:p>
-        </p:txBody>
-      </p:sp>
-      <p:sp>
-        <p:nvSpPr>
-          <p:cNvPr id="4" name="TextBox 3"/>
-          <p:cNvSpPr txBox="1"/>
-          <p:nvPr/>
-        </p:nvSpPr>
-        <p:spPr>
-          <a:xfrm>
-            <a:off x="914400" y="2194560"/>
-            <a:ext cx="16459200" cy="7315200"/>
-          </a:xfrm>
-          <a:prstGeom prst="rect">
-            <a:avLst/>
-          </a:prstGeom>
-          <a:noFill/>
-        </p:spPr>
-        <p:txBody>
-          <a:bodyPr wrap="square" anchor="t" lIns="25400" rIns="25400" tIns="25400" bIns="25400">
-            <a:spAutoFit/>
-          </a:bodyPr>
-          <a:lstStyle/>
-          <a:p>
-            <a:pPr algn="l">
-              <a:spcAft>
-                <a:spcPts val="1600"/>
-              </a:spcAft>
-              <a:buFont typeface="Arial"/>
-              <a:buChar char="-"/>
-            </a:pPr>
-            <a:r>
-              <a:rPr sz="2000" b="1" i="0">
-                <a:solidFill>
-                  <a:srgbClr val="FFFFFF"/>
-                </a:solidFill>
-                <a:latin typeface="Open Sans"/>
-              </a:rPr>
-              <a:t>Satellite pretraining markedly improves data-scarce segmentation: </a:t>
-            </a:r>
-            <a:r>
-              <a:rPr sz="2000" b="0" i="0">
-                <a:solidFill>
-                  <a:srgbClr val="FFFFFF"/>
-                </a:solidFill>
-                <a:latin typeface="Open Sans"/>
-              </a:rPr>
-              <a:t>mIoU 0.09 -&gt; 0.31 at equal data.</a:t>
-            </a:r>
-          </a:p>
-          <a:p>
-            <a:pPr algn="l">
-              <a:spcAft>
-                <a:spcPts val="1600"/>
-              </a:spcAft>
-              <a:buFont typeface="Arial"/>
-              <a:buChar char="-"/>
-            </a:pPr>
-            <a:r>
-              <a:rPr sz="2000" b="1" i="0">
-                <a:solidFill>
-                  <a:srgbClr val="FFFFFF"/>
-                </a:solidFill>
-                <a:latin typeface="Open Sans"/>
-              </a:rPr>
-              <a:t>Frozen SatMAE++ = best performance / compute trade-off </a:t>
-            </a:r>
-            <a:r>
-              <a:rPr sz="2000" b="0" i="0">
-                <a:solidFill>
-                  <a:srgbClr val="FFFFFF"/>
-                </a:solidFill>
-                <a:latin typeface="Open Sans"/>
-              </a:rPr>
-              <a:t>on Colab.</a:t>
-            </a:r>
-          </a:p>
-          <a:p>
-            <a:pPr algn="l">
-              <a:spcAft>
-                <a:spcPts val="1600"/>
-              </a:spcAft>
-              <a:buFont typeface="Arial"/>
-              <a:buChar char="-"/>
-            </a:pPr>
-            <a:r>
-              <a:rPr sz="2000" b="1" i="0">
-                <a:solidFill>
-                  <a:srgbClr val="FFFFFF"/>
-                </a:solidFill>
-                <a:latin typeface="Open Sans"/>
-              </a:rPr>
-              <a:t>Wavelets do not help semantic segmentation </a:t>
-            </a:r>
-            <a:r>
-              <a:rPr sz="2000" b="0" i="0">
-                <a:solidFill>
-                  <a:srgbClr val="FFFFFF"/>
-                </a:solidFill>
-                <a:latin typeface="Open Sans"/>
-              </a:rPr>
-              <a:t>(explained negative): critical thinking, not a missing feature.</a:t>
-            </a:r>
-          </a:p>
-          <a:p>
-            <a:pPr algn="l">
-              <a:spcAft>
-                <a:spcPts val="0"/>
-              </a:spcAft>
-              <a:buFont typeface="Arial"/>
-              <a:buChar char="-"/>
-            </a:pPr>
-            <a:r>
-              <a:rPr sz="2000" b="1" i="0">
-                <a:solidFill>
-                  <a:srgbClr val="F0D8D8"/>
-                </a:solidFill>
-                <a:latin typeface="Open Sans"/>
-              </a:rPr>
-              <a:t>Next steps: </a:t>
-            </a:r>
-            <a:r>
-              <a:rPr sz="2000" b="0" i="0">
-                <a:solidFill>
-                  <a:srgbClr val="F0D8D8"/>
-                </a:solidFill>
-                <a:latin typeface="Open Sans"/>
-              </a:rPr>
-              <a:t>multispectral input (Sentinel-2) and SAM pseudo-labels.</a:t>
+              <a:t>Main Result</a:t>
             </a:r>
           </a:p>
         </p:txBody>
